--- a/agent_lightning_separate_async_tq.pptx
+++ b/agent_lightning_separate_async_tq.pptx
@@ -9,6 +9,8 @@
     <p:sldId id="259" r:id="rId3"/>
     <p:sldId id="257" r:id="rId4"/>
     <p:sldId id="258" r:id="rId5"/>
+    <p:sldId id="260" r:id="rId6"/>
+    <p:sldId id="261" r:id="rId11"/>
   </p:sldIdLst>
   <p:sldSz cx="12192000" cy="6858000"/>
   <p:notesSz cx="6858000" cy="9144000"/>
@@ -126,6 +128,886 @@
 </p:presentation>
 </file>
 
+<file path=ppt/charts/chart1.xml><?xml version="1.0" encoding="utf-8"?>
+<c:chartSpace xmlns:c="http://schemas.openxmlformats.org/drawingml/2006/chart" xmlns:a="http://schemas.openxmlformats.org/drawingml/2006/main" xmlns:r="http://schemas.openxmlformats.org/officeDocument/2006/relationships" xmlns:c16r2="http://schemas.microsoft.com/office/drawing/2015/06/chart">
+  <c:date1904 val="0"/>
+  <c:lang val="en-GB"/>
+  <c:roundedCorners val="1"/>
+  <c:style val="2"/>
+  <c:chart>
+    <c:autoTitleDeleted val="0"/>
+    <c:plotArea>
+      <c:layout/>
+      <c:lineChart>
+        <c:grouping val="standard"/>
+        <c:varyColors val="0"/>
+        <c:ser>
+          <c:idx val="0"/>
+          <c:order val="0"/>
+          <c:tx>
+            <c:strRef>
+              <c:f>Sheet1!$B$1</c:f>
+              <c:strCache>
+                <c:ptCount val="1"/>
+                <c:pt idx="0">
+                  <c:v>共卡同步</c:v>
+                </c:pt>
+              </c:strCache>
+            </c:strRef>
+          </c:tx>
+          <c:spPr>
+            <a:ln w="34925">
+              <a:solidFill>
+                <a:srgbClr val="8A96A3"/>
+              </a:solidFill>
+            </a:ln>
+          </c:spPr>
+          <c:marker>
+            <c:symbol val="circle"/>
+            <c:size val="8"/>
+            <c:spPr>
+              <a:solidFill>
+                <a:srgbClr val="8A96A3"/>
+              </a:solidFill>
+              <a:ln>
+                <a:solidFill>
+                  <a:srgbClr val="8A96A3"/>
+                </a:solidFill>
+              </a:ln>
+            </c:spPr>
+          </c:marker>
+          <c:dLbls>
+            <c:numFmt formatCode="0" sourceLinked="0"/>
+            <c:spPr>
+              <a:noFill/>
+              <a:ln>
+                <a:noFill/>
+              </a:ln>
+              <a:effectLst/>
+            </c:spPr>
+            <c:txPr>
+              <a:bodyPr/>
+              <a:lstStyle/>
+              <a:p>
+                <a:pPr>
+                  <a:defRPr sz="1000" b="1">
+                    <a:solidFill>
+                      <a:srgbClr val="8A96A3"/>
+                    </a:solidFill>
+                  </a:defRPr>
+                </a:pPr>
+                <a:endParaRPr lang="en-US"/>
+              </a:p>
+            </c:txPr>
+            <c:dLblPos val="t"/>
+            <c:showLegendKey val="0"/>
+            <c:showVal val="1"/>
+            <c:showCatName val="0"/>
+            <c:showSerName val="0"/>
+            <c:showPercent val="0"/>
+            <c:showBubbleSize val="0"/>
+            <c:showLeaderLines val="0"/>
+            <c:extLst>
+              <c:ext xmlns:c15="http://schemas.microsoft.com/office/drawing/2012/chart" uri="{CE6537A1-D6FC-4f65-9D91-7224C49458BB}">
+                <c15:showLeaderLines val="0"/>
+              </c:ext>
+            </c:extLst>
+          </c:dLbls>
+          <c:cat>
+            <c:strRef>
+              <c:f>Sheet1!$A$2:$A$8</c:f>
+              <c:strCache>
+                <c:ptCount val="7"/>
+                <c:pt idx="0">
+                  <c:v>2</c:v>
+                </c:pt>
+                <c:pt idx="1">
+                  <c:v>3</c:v>
+                </c:pt>
+                <c:pt idx="2">
+                  <c:v>4</c:v>
+                </c:pt>
+                <c:pt idx="3">
+                  <c:v>5</c:v>
+                </c:pt>
+                <c:pt idx="4">
+                  <c:v>6</c:v>
+                </c:pt>
+                <c:pt idx="5">
+                  <c:v>7</c:v>
+                </c:pt>
+                <c:pt idx="6">
+                  <c:v>8</c:v>
+                </c:pt>
+              </c:strCache>
+            </c:strRef>
+          </c:cat>
+          <c:val>
+            <c:numRef>
+              <c:f>Sheet1!$B$2:$B$8</c:f>
+              <c:numCache>
+                <c:formatCode>General</c:formatCode>
+                <c:ptCount val="7"/>
+                <c:pt idx="0">
+                  <c:v>294.39999999999998</c:v>
+                </c:pt>
+                <c:pt idx="1">
+                  <c:v>313.10000000000002</c:v>
+                </c:pt>
+                <c:pt idx="2">
+                  <c:v>327.10000000000002</c:v>
+                </c:pt>
+                <c:pt idx="3">
+                  <c:v>317</c:v>
+                </c:pt>
+                <c:pt idx="4">
+                  <c:v>300.2</c:v>
+                </c:pt>
+                <c:pt idx="5">
+                  <c:v>326.7</c:v>
+                </c:pt>
+                <c:pt idx="6">
+                  <c:v>319.5</c:v>
+                </c:pt>
+              </c:numCache>
+            </c:numRef>
+          </c:val>
+          <c:smooth val="0"/>
+          <c:extLst>
+            <c:ext xmlns:c16="http://schemas.microsoft.com/office/drawing/2014/chart" uri="{C3380CC4-5D6E-409C-BE32-E72D297353CC}">
+              <c16:uniqueId val="{00000000-C2AD-C746-9D9F-261D34B6D32E}"/>
+            </c:ext>
+          </c:extLst>
+        </c:ser>
+        <c:ser>
+          <c:idx val="1"/>
+          <c:order val="1"/>
+          <c:tx>
+            <c:strRef>
+              <c:f>Sheet1!$C$1</c:f>
+              <c:strCache>
+                <c:ptCount val="1"/>
+                <c:pt idx="0">
+                  <c:v>TQ 分离异步</c:v>
+                </c:pt>
+              </c:strCache>
+            </c:strRef>
+          </c:tx>
+          <c:spPr>
+            <a:ln w="34925">
+              <a:solidFill>
+                <a:srgbClr val="2C6E8F"/>
+              </a:solidFill>
+            </a:ln>
+          </c:spPr>
+          <c:marker>
+            <c:symbol val="circle"/>
+            <c:size val="8"/>
+            <c:spPr>
+              <a:solidFill>
+                <a:srgbClr val="2C6E8F"/>
+              </a:solidFill>
+              <a:ln>
+                <a:solidFill>
+                  <a:srgbClr val="2C6E8F"/>
+                </a:solidFill>
+              </a:ln>
+            </c:spPr>
+          </c:marker>
+          <c:dLbls>
+            <c:dLbl>
+              <c:idx val="0"/>
+              <c:numFmt formatCode="0" sourceLinked="0"/>
+              <c:spPr/>
+              <c:txPr>
+                <a:bodyPr/>
+                <a:lstStyle/>
+                <a:p>
+                  <a:pPr>
+                    <a:defRPr sz="1000" b="1">
+                      <a:solidFill>
+                        <a:srgbClr val="2C6E8F"/>
+                      </a:solidFill>
+                    </a:defRPr>
+                  </a:pPr>
+                  <a:endParaRPr lang="en-US"/>
+                </a:p>
+              </c:txPr>
+              <c:dLblPos val="b"/>
+              <c:showLegendKey val="0"/>
+              <c:showVal val="1"/>
+              <c:showCatName val="0"/>
+              <c:showSerName val="0"/>
+              <c:showPercent val="0"/>
+              <c:showBubbleSize val="0"/>
+              <c:extLst>
+                <c:ext xmlns:c15="http://schemas.microsoft.com/office/drawing/2012/chart" uri="{CE6537A1-D6FC-4f65-9D91-7224C49458BB}"/>
+                <c:ext xmlns:c16="http://schemas.microsoft.com/office/drawing/2014/chart" uri="{C3380CC4-5D6E-409C-BE32-E72D297353CC}">
+                  <c16:uniqueId val="{00000001-C2AD-C746-9D9F-261D34B6D32E}"/>
+                </c:ext>
+              </c:extLst>
+            </c:dLbl>
+            <c:dLbl>
+              <c:idx val="1"/>
+              <c:numFmt formatCode="0" sourceLinked="0"/>
+              <c:spPr/>
+              <c:txPr>
+                <a:bodyPr/>
+                <a:lstStyle/>
+                <a:p>
+                  <a:pPr>
+                    <a:defRPr sz="1000" b="1">
+                      <a:solidFill>
+                        <a:srgbClr val="2C6E8F"/>
+                      </a:solidFill>
+                    </a:defRPr>
+                  </a:pPr>
+                  <a:endParaRPr lang="en-US"/>
+                </a:p>
+              </c:txPr>
+              <c:dLblPos val="t"/>
+              <c:showLegendKey val="0"/>
+              <c:showVal val="1"/>
+              <c:showCatName val="0"/>
+              <c:showSerName val="0"/>
+              <c:showPercent val="0"/>
+              <c:showBubbleSize val="0"/>
+              <c:extLst>
+                <c:ext xmlns:c16="http://schemas.microsoft.com/office/drawing/2014/chart" uri="{C3380CC4-5D6E-409C-BE32-E72D297353CC}">
+                  <c16:uniqueId val="{00000002-C2AD-C746-9D9F-261D34B6D32E}"/>
+                </c:ext>
+              </c:extLst>
+            </c:dLbl>
+            <c:dLbl>
+              <c:idx val="2"/>
+              <c:numFmt formatCode="0" sourceLinked="0"/>
+              <c:spPr/>
+              <c:txPr>
+                <a:bodyPr/>
+                <a:lstStyle/>
+                <a:p>
+                  <a:pPr>
+                    <a:defRPr sz="1000" b="1">
+                      <a:solidFill>
+                        <a:srgbClr val="2C6E8F"/>
+                      </a:solidFill>
+                    </a:defRPr>
+                  </a:pPr>
+                  <a:endParaRPr lang="en-US"/>
+                </a:p>
+              </c:txPr>
+              <c:dLblPos val="b"/>
+              <c:showLegendKey val="0"/>
+              <c:showVal val="1"/>
+              <c:showCatName val="0"/>
+              <c:showSerName val="0"/>
+              <c:showPercent val="0"/>
+              <c:showBubbleSize val="0"/>
+              <c:extLst>
+                <c:ext xmlns:c15="http://schemas.microsoft.com/office/drawing/2012/chart" uri="{CE6537A1-D6FC-4f65-9D91-7224C49458BB}"/>
+                <c:ext xmlns:c16="http://schemas.microsoft.com/office/drawing/2014/chart" uri="{C3380CC4-5D6E-409C-BE32-E72D297353CC}">
+                  <c16:uniqueId val="{00000003-C2AD-C746-9D9F-261D34B6D32E}"/>
+                </c:ext>
+              </c:extLst>
+            </c:dLbl>
+            <c:dLbl>
+              <c:idx val="3"/>
+              <c:numFmt formatCode="0" sourceLinked="0"/>
+              <c:spPr/>
+              <c:txPr>
+                <a:bodyPr/>
+                <a:lstStyle/>
+                <a:p>
+                  <a:pPr>
+                    <a:defRPr sz="1000" b="1">
+                      <a:solidFill>
+                        <a:srgbClr val="2C6E8F"/>
+                      </a:solidFill>
+                    </a:defRPr>
+                  </a:pPr>
+                  <a:endParaRPr lang="en-US"/>
+                </a:p>
+              </c:txPr>
+              <c:dLblPos val="b"/>
+              <c:showLegendKey val="0"/>
+              <c:showVal val="1"/>
+              <c:showCatName val="0"/>
+              <c:showSerName val="0"/>
+              <c:showPercent val="0"/>
+              <c:showBubbleSize val="0"/>
+              <c:extLst>
+                <c:ext xmlns:c15="http://schemas.microsoft.com/office/drawing/2012/chart" uri="{CE6537A1-D6FC-4f65-9D91-7224C49458BB}"/>
+                <c:ext xmlns:c16="http://schemas.microsoft.com/office/drawing/2014/chart" uri="{C3380CC4-5D6E-409C-BE32-E72D297353CC}">
+                  <c16:uniqueId val="{00000004-C2AD-C746-9D9F-261D34B6D32E}"/>
+                </c:ext>
+              </c:extLst>
+            </c:dLbl>
+            <c:dLbl>
+              <c:idx val="4"/>
+              <c:numFmt formatCode="0" sourceLinked="0"/>
+              <c:spPr/>
+              <c:txPr>
+                <a:bodyPr/>
+                <a:lstStyle/>
+                <a:p>
+                  <a:pPr>
+                    <a:defRPr sz="1000" b="1">
+                      <a:solidFill>
+                        <a:srgbClr val="2C6E8F"/>
+                      </a:solidFill>
+                    </a:defRPr>
+                  </a:pPr>
+                  <a:endParaRPr lang="en-US"/>
+                </a:p>
+              </c:txPr>
+              <c:dLblPos val="t"/>
+              <c:showLegendKey val="0"/>
+              <c:showVal val="1"/>
+              <c:showCatName val="0"/>
+              <c:showSerName val="0"/>
+              <c:showPercent val="0"/>
+              <c:showBubbleSize val="0"/>
+              <c:extLst>
+                <c:ext xmlns:c16="http://schemas.microsoft.com/office/drawing/2014/chart" uri="{C3380CC4-5D6E-409C-BE32-E72D297353CC}">
+                  <c16:uniqueId val="{00000005-C2AD-C746-9D9F-261D34B6D32E}"/>
+                </c:ext>
+              </c:extLst>
+            </c:dLbl>
+            <c:dLbl>
+              <c:idx val="5"/>
+              <c:numFmt formatCode="0" sourceLinked="0"/>
+              <c:spPr/>
+              <c:txPr>
+                <a:bodyPr/>
+                <a:lstStyle/>
+                <a:p>
+                  <a:pPr>
+                    <a:defRPr sz="1000" b="1">
+                      <a:solidFill>
+                        <a:srgbClr val="2C6E8F"/>
+                      </a:solidFill>
+                    </a:defRPr>
+                  </a:pPr>
+                  <a:endParaRPr lang="en-US"/>
+                </a:p>
+              </c:txPr>
+              <c:dLblPos val="b"/>
+              <c:showLegendKey val="0"/>
+              <c:showVal val="1"/>
+              <c:showCatName val="0"/>
+              <c:showSerName val="0"/>
+              <c:showPercent val="0"/>
+              <c:showBubbleSize val="0"/>
+              <c:extLst>
+                <c:ext xmlns:c15="http://schemas.microsoft.com/office/drawing/2012/chart" uri="{CE6537A1-D6FC-4f65-9D91-7224C49458BB}"/>
+                <c:ext xmlns:c16="http://schemas.microsoft.com/office/drawing/2014/chart" uri="{C3380CC4-5D6E-409C-BE32-E72D297353CC}">
+                  <c16:uniqueId val="{00000006-C2AD-C746-9D9F-261D34B6D32E}"/>
+                </c:ext>
+              </c:extLst>
+            </c:dLbl>
+            <c:dLbl>
+              <c:idx val="6"/>
+              <c:numFmt formatCode="0" sourceLinked="0"/>
+              <c:spPr/>
+              <c:txPr>
+                <a:bodyPr/>
+                <a:lstStyle/>
+                <a:p>
+                  <a:pPr>
+                    <a:defRPr sz="1000" b="1">
+                      <a:solidFill>
+                        <a:srgbClr val="2C6E8F"/>
+                      </a:solidFill>
+                    </a:defRPr>
+                  </a:pPr>
+                  <a:endParaRPr lang="en-US"/>
+                </a:p>
+              </c:txPr>
+              <c:dLblPos val="b"/>
+              <c:showLegendKey val="0"/>
+              <c:showVal val="1"/>
+              <c:showCatName val="0"/>
+              <c:showSerName val="0"/>
+              <c:showPercent val="0"/>
+              <c:showBubbleSize val="0"/>
+              <c:extLst>
+                <c:ext xmlns:c15="http://schemas.microsoft.com/office/drawing/2012/chart" uri="{CE6537A1-D6FC-4f65-9D91-7224C49458BB}"/>
+                <c:ext xmlns:c16="http://schemas.microsoft.com/office/drawing/2014/chart" uri="{C3380CC4-5D6E-409C-BE32-E72D297353CC}">
+                  <c16:uniqueId val="{00000007-C2AD-C746-9D9F-261D34B6D32E}"/>
+                </c:ext>
+              </c:extLst>
+            </c:dLbl>
+            <c:numFmt formatCode="0" sourceLinked="0"/>
+            <c:spPr>
+              <a:noFill/>
+              <a:ln>
+                <a:noFill/>
+              </a:ln>
+              <a:effectLst/>
+            </c:spPr>
+            <c:txPr>
+              <a:bodyPr/>
+              <a:lstStyle/>
+              <a:p>
+                <a:pPr>
+                  <a:defRPr sz="1000" b="1">
+                    <a:solidFill>
+                      <a:srgbClr val="2C6E8F"/>
+                    </a:solidFill>
+                  </a:defRPr>
+                </a:pPr>
+                <a:endParaRPr lang="en-US"/>
+              </a:p>
+            </c:txPr>
+            <c:dLblPos val="t"/>
+            <c:showLegendKey val="0"/>
+            <c:showVal val="1"/>
+            <c:showCatName val="0"/>
+            <c:showSerName val="0"/>
+            <c:showPercent val="0"/>
+            <c:showBubbleSize val="0"/>
+            <c:showLeaderLines val="0"/>
+            <c:extLst>
+              <c:ext xmlns:c15="http://schemas.microsoft.com/office/drawing/2012/chart" uri="{CE6537A1-D6FC-4f65-9D91-7224C49458BB}">
+                <c15:showLeaderLines val="0"/>
+              </c:ext>
+            </c:extLst>
+          </c:dLbls>
+          <c:cat>
+            <c:strRef>
+              <c:f>Sheet1!$A$2:$A$8</c:f>
+              <c:strCache>
+                <c:ptCount val="7"/>
+                <c:pt idx="0">
+                  <c:v>2</c:v>
+                </c:pt>
+                <c:pt idx="1">
+                  <c:v>3</c:v>
+                </c:pt>
+                <c:pt idx="2">
+                  <c:v>4</c:v>
+                </c:pt>
+                <c:pt idx="3">
+                  <c:v>5</c:v>
+                </c:pt>
+                <c:pt idx="4">
+                  <c:v>6</c:v>
+                </c:pt>
+                <c:pt idx="5">
+                  <c:v>7</c:v>
+                </c:pt>
+                <c:pt idx="6">
+                  <c:v>8</c:v>
+                </c:pt>
+              </c:strCache>
+            </c:strRef>
+          </c:cat>
+          <c:val>
+            <c:numRef>
+              <c:f>Sheet1!$C$2:$C$8</c:f>
+              <c:numCache>
+                <c:formatCode>General</c:formatCode>
+                <c:ptCount val="7"/>
+                <c:pt idx="0">
+                  <c:v>127.7</c:v>
+                </c:pt>
+                <c:pt idx="1">
+                  <c:v>440.3</c:v>
+                </c:pt>
+                <c:pt idx="2">
+                  <c:v>119.6</c:v>
+                </c:pt>
+                <c:pt idx="3">
+                  <c:v>274</c:v>
+                </c:pt>
+                <c:pt idx="4">
+                  <c:v>408.6</c:v>
+                </c:pt>
+                <c:pt idx="5">
+                  <c:v>100.7</c:v>
+                </c:pt>
+                <c:pt idx="6">
+                  <c:v>260.2</c:v>
+                </c:pt>
+              </c:numCache>
+            </c:numRef>
+          </c:val>
+          <c:smooth val="0"/>
+          <c:extLst>
+            <c:ext xmlns:c16="http://schemas.microsoft.com/office/drawing/2014/chart" uri="{C3380CC4-5D6E-409C-BE32-E72D297353CC}">
+              <c16:uniqueId val="{00000008-C2AD-C746-9D9F-261D34B6D32E}"/>
+            </c:ext>
+          </c:extLst>
+        </c:ser>
+        <c:ser>
+          <c:idx val="2"/>
+          <c:order val="2"/>
+          <c:tx>
+            <c:strRef>
+              <c:f>Sheet1!$D$1</c:f>
+              <c:strCache>
+                <c:ptCount val="1"/>
+                <c:pt idx="0">
+                  <c:v>共卡平均 314.0 s</c:v>
+                </c:pt>
+              </c:strCache>
+            </c:strRef>
+          </c:tx>
+          <c:spPr>
+            <a:ln w="19050">
+              <a:solidFill>
+                <a:srgbClr val="8A96A3"/>
+              </a:solidFill>
+              <a:prstDash val="dash"/>
+            </a:ln>
+          </c:spPr>
+          <c:marker>
+            <c:symbol val="none"/>
+          </c:marker>
+          <c:cat>
+            <c:strRef>
+              <c:f>Sheet1!$A$2:$A$8</c:f>
+              <c:strCache>
+                <c:ptCount val="7"/>
+                <c:pt idx="0">
+                  <c:v>2</c:v>
+                </c:pt>
+                <c:pt idx="1">
+                  <c:v>3</c:v>
+                </c:pt>
+                <c:pt idx="2">
+                  <c:v>4</c:v>
+                </c:pt>
+                <c:pt idx="3">
+                  <c:v>5</c:v>
+                </c:pt>
+                <c:pt idx="4">
+                  <c:v>6</c:v>
+                </c:pt>
+                <c:pt idx="5">
+                  <c:v>7</c:v>
+                </c:pt>
+                <c:pt idx="6">
+                  <c:v>8</c:v>
+                </c:pt>
+              </c:strCache>
+            </c:strRef>
+          </c:cat>
+          <c:val>
+            <c:numRef>
+              <c:f>Sheet1!$D$2:$D$8</c:f>
+              <c:numCache>
+                <c:formatCode>General</c:formatCode>
+                <c:ptCount val="7"/>
+                <c:pt idx="0">
+                  <c:v>314</c:v>
+                </c:pt>
+                <c:pt idx="1">
+                  <c:v>314</c:v>
+                </c:pt>
+                <c:pt idx="2">
+                  <c:v>314</c:v>
+                </c:pt>
+                <c:pt idx="3">
+                  <c:v>314</c:v>
+                </c:pt>
+                <c:pt idx="4">
+                  <c:v>314</c:v>
+                </c:pt>
+                <c:pt idx="5">
+                  <c:v>314</c:v>
+                </c:pt>
+                <c:pt idx="6">
+                  <c:v>314</c:v>
+                </c:pt>
+              </c:numCache>
+            </c:numRef>
+          </c:val>
+          <c:smooth val="0"/>
+          <c:extLst>
+            <c:ext xmlns:c16="http://schemas.microsoft.com/office/drawing/2014/chart" uri="{C3380CC4-5D6E-409C-BE32-E72D297353CC}">
+              <c16:uniqueId val="{00000009-C2AD-C746-9D9F-261D34B6D32E}"/>
+            </c:ext>
+          </c:extLst>
+        </c:ser>
+        <c:ser>
+          <c:idx val="3"/>
+          <c:order val="3"/>
+          <c:tx>
+            <c:strRef>
+              <c:f>Sheet1!$E$1</c:f>
+              <c:strCache>
+                <c:ptCount val="1"/>
+                <c:pt idx="0">
+                  <c:v>TQ 分离平均 247.3 s</c:v>
+                </c:pt>
+              </c:strCache>
+            </c:strRef>
+          </c:tx>
+          <c:spPr>
+            <a:ln w="19050">
+              <a:solidFill>
+                <a:srgbClr val="2C6E8F"/>
+              </a:solidFill>
+              <a:prstDash val="dash"/>
+            </a:ln>
+          </c:spPr>
+          <c:marker>
+            <c:symbol val="none"/>
+          </c:marker>
+          <c:cat>
+            <c:strRef>
+              <c:f>Sheet1!$A$2:$A$8</c:f>
+              <c:strCache>
+                <c:ptCount val="7"/>
+                <c:pt idx="0">
+                  <c:v>2</c:v>
+                </c:pt>
+                <c:pt idx="1">
+                  <c:v>3</c:v>
+                </c:pt>
+                <c:pt idx="2">
+                  <c:v>4</c:v>
+                </c:pt>
+                <c:pt idx="3">
+                  <c:v>5</c:v>
+                </c:pt>
+                <c:pt idx="4">
+                  <c:v>6</c:v>
+                </c:pt>
+                <c:pt idx="5">
+                  <c:v>7</c:v>
+                </c:pt>
+                <c:pt idx="6">
+                  <c:v>8</c:v>
+                </c:pt>
+              </c:strCache>
+            </c:strRef>
+          </c:cat>
+          <c:val>
+            <c:numRef>
+              <c:f>Sheet1!$E$2:$E$8</c:f>
+              <c:numCache>
+                <c:formatCode>General</c:formatCode>
+                <c:ptCount val="7"/>
+                <c:pt idx="0">
+                  <c:v>247.3</c:v>
+                </c:pt>
+                <c:pt idx="1">
+                  <c:v>247.3</c:v>
+                </c:pt>
+                <c:pt idx="2">
+                  <c:v>247.3</c:v>
+                </c:pt>
+                <c:pt idx="3">
+                  <c:v>247.3</c:v>
+                </c:pt>
+                <c:pt idx="4">
+                  <c:v>247.3</c:v>
+                </c:pt>
+                <c:pt idx="5">
+                  <c:v>247.3</c:v>
+                </c:pt>
+                <c:pt idx="6">
+                  <c:v>247.3</c:v>
+                </c:pt>
+              </c:numCache>
+            </c:numRef>
+          </c:val>
+          <c:smooth val="0"/>
+          <c:extLst>
+            <c:ext xmlns:c16="http://schemas.microsoft.com/office/drawing/2014/chart" uri="{C3380CC4-5D6E-409C-BE32-E72D297353CC}">
+              <c16:uniqueId val="{0000000A-C2AD-C746-9D9F-261D34B6D32E}"/>
+            </c:ext>
+          </c:extLst>
+        </c:ser>
+        <c:dLbls>
+          <c:showLegendKey val="0"/>
+          <c:showVal val="0"/>
+          <c:showCatName val="0"/>
+          <c:showSerName val="0"/>
+          <c:showPercent val="0"/>
+          <c:showBubbleSize val="0"/>
+        </c:dLbls>
+        <c:marker val="1"/>
+        <c:smooth val="0"/>
+        <c:axId val="2118791784"/>
+        <c:axId val="2140495176"/>
+      </c:lineChart>
+      <c:catAx>
+        <c:axId val="2118791784"/>
+        <c:scaling>
+          <c:orientation val="minMax"/>
+        </c:scaling>
+        <c:delete val="0"/>
+        <c:axPos val="b"/>
+        <c:title>
+          <c:tx>
+            <c:rich>
+              <a:bodyPr/>
+              <a:lstStyle/>
+              <a:p>
+                <a:r>
+                  <a:rPr lang="en-SG" sz="1100" b="0">
+                    <a:solidFill>
+                      <a:srgbClr val="6B7A8A"/>
+                    </a:solidFill>
+                    <a:latin typeface="PingFang SC"/>
+                  </a:rPr>
+                  <a:t>step</a:t>
+                </a:r>
+              </a:p>
+            </c:rich>
+          </c:tx>
+          <c:overlay val="0"/>
+        </c:title>
+        <c:numFmt formatCode="General" sourceLinked="0"/>
+        <c:majorTickMark val="out"/>
+        <c:minorTickMark val="none"/>
+        <c:tickLblPos val="nextTo"/>
+        <c:spPr>
+          <a:ln>
+            <a:solidFill>
+              <a:srgbClr val="C5CCD3"/>
+            </a:solidFill>
+          </a:ln>
+        </c:spPr>
+        <c:txPr>
+          <a:bodyPr/>
+          <a:lstStyle/>
+          <a:p>
+            <a:pPr>
+              <a:defRPr sz="1100">
+                <a:solidFill>
+                  <a:srgbClr val="6B7A8A"/>
+                </a:solidFill>
+              </a:defRPr>
+            </a:pPr>
+            <a:endParaRPr lang="en-US"/>
+          </a:p>
+        </c:txPr>
+        <c:crossAx val="2140495176"/>
+        <c:crosses val="autoZero"/>
+        <c:auto val="1"/>
+        <c:lblAlgn val="ctr"/>
+        <c:lblOffset val="100"/>
+        <c:noMultiLvlLbl val="0"/>
+      </c:catAx>
+      <c:valAx>
+        <c:axId val="2140495176"/>
+        <c:scaling>
+          <c:orientation val="minMax"/>
+          <c:max val="500"/>
+          <c:min val="0"/>
+        </c:scaling>
+        <c:delete val="0"/>
+        <c:axPos val="l"/>
+        <c:majorGridlines>
+          <c:spPr>
+            <a:ln>
+              <a:solidFill>
+                <a:srgbClr val="E1E5EA"/>
+              </a:solidFill>
+            </a:ln>
+          </c:spPr>
+        </c:majorGridlines>
+        <c:title>
+          <c:tx>
+            <c:rich>
+              <a:bodyPr/>
+              <a:lstStyle/>
+              <a:p>
+                <a:r>
+                  <a:rPr lang="zh-CN" altLang="en-US" sz="1100" b="0">
+                    <a:solidFill>
+                      <a:srgbClr val="6B7A8A"/>
+                    </a:solidFill>
+                    <a:latin typeface="PingFang SC"/>
+                  </a:rPr>
+                  <a:t>端到端时间（</a:t>
+                </a:r>
+                <a:r>
+                  <a:rPr lang="en-SG" sz="1100" b="0">
+                    <a:solidFill>
+                      <a:srgbClr val="6B7A8A"/>
+                    </a:solidFill>
+                    <a:latin typeface="PingFang SC"/>
+                  </a:rPr>
+                  <a:t>s）</a:t>
+                </a:r>
+              </a:p>
+            </c:rich>
+          </c:tx>
+          <c:overlay val="0"/>
+        </c:title>
+        <c:numFmt formatCode="General" sourceLinked="1"/>
+        <c:majorTickMark val="out"/>
+        <c:minorTickMark val="none"/>
+        <c:tickLblPos val="nextTo"/>
+        <c:spPr>
+          <a:ln>
+            <a:noFill/>
+          </a:ln>
+        </c:spPr>
+        <c:txPr>
+          <a:bodyPr/>
+          <a:lstStyle/>
+          <a:p>
+            <a:pPr>
+              <a:defRPr sz="1000">
+                <a:solidFill>
+                  <a:srgbClr val="6B7A8A"/>
+                </a:solidFill>
+              </a:defRPr>
+            </a:pPr>
+            <a:endParaRPr lang="en-US"/>
+          </a:p>
+        </c:txPr>
+        <c:crossAx val="2118791784"/>
+        <c:crosses val="autoZero"/>
+        <c:crossBetween val="between"/>
+        <c:majorUnit val="100"/>
+      </c:valAx>
+    </c:plotArea>
+    <c:legend>
+      <c:legendPos val="t"/>
+      <c:overlay val="0"/>
+      <c:txPr>
+        <a:bodyPr/>
+        <a:lstStyle/>
+        <a:p>
+          <a:pPr>
+            <a:defRPr sz="1100"/>
+          </a:pPr>
+          <a:endParaRPr lang="en-US"/>
+        </a:p>
+      </c:txPr>
+    </c:legend>
+    <c:plotVisOnly val="1"/>
+    <c:dispBlanksAs val="gap"/>
+    <c:showDLblsOverMax val="0"/>
+  </c:chart>
+  <c:txPr>
+    <a:bodyPr/>
+    <a:lstStyle/>
+    <a:p>
+      <a:pPr>
+        <a:defRPr sz="1100">
+          <a:solidFill>
+            <a:srgbClr val="1F2933"/>
+          </a:solidFill>
+          <a:latin typeface="PingFang SC"/>
+        </a:defRPr>
+      </a:pPr>
+      <a:endParaRPr lang="en-US"/>
+    </a:p>
+  </c:txPr>
+  <c:externalData r:id="rId1">
+    <c:autoUpdate val="0"/>
+  </c:externalData>
+</c:chartSpace>
+</file>
+
 <file path=ppt/slideLayouts/slideLayout1.xml><?xml version="1.0" encoding="utf-8"?>
 <p:sldLayout xmlns:a="http://schemas.openxmlformats.org/drawingml/2006/main" xmlns:r="http://schemas.openxmlformats.org/officeDocument/2006/relationships" xmlns:p="http://schemas.openxmlformats.org/presentationml/2006/main" type="title" preserve="1">
   <p:cSld name="Title Slide">
@@ -305,7 +1187,7 @@
           <a:p>
             <a:fld id="{5BCAD085-E8A6-8845-BD4E-CB4CCA059FC4}" type="datetimeFigureOut">
               <a:rPr lang="en-US" smtClean="0"/>
-              <a:t>10/12/26</a:t>
+              <a:t>10/15/26</a:t>
             </a:fld>
             <a:endParaRPr lang="en-US"/>
           </a:p>
@@ -473,7 +1355,7 @@
           <a:p>
             <a:fld id="{5BCAD085-E8A6-8845-BD4E-CB4CCA059FC4}" type="datetimeFigureOut">
               <a:rPr lang="en-US" smtClean="0"/>
-              <a:t>10/12/26</a:t>
+              <a:t>10/15/26</a:t>
             </a:fld>
             <a:endParaRPr lang="en-US"/>
           </a:p>
@@ -651,7 +1533,7 @@
           <a:p>
             <a:fld id="{5BCAD085-E8A6-8845-BD4E-CB4CCA059FC4}" type="datetimeFigureOut">
               <a:rPr lang="en-US" smtClean="0"/>
-              <a:t>10/12/26</a:t>
+              <a:t>10/15/26</a:t>
             </a:fld>
             <a:endParaRPr lang="en-US"/>
           </a:p>
@@ -819,7 +1701,7 @@
           <a:p>
             <a:fld id="{5BCAD085-E8A6-8845-BD4E-CB4CCA059FC4}" type="datetimeFigureOut">
               <a:rPr lang="en-US" smtClean="0"/>
-              <a:t>10/12/26</a:t>
+              <a:t>10/15/26</a:t>
             </a:fld>
             <a:endParaRPr lang="en-US"/>
           </a:p>
@@ -1064,7 +1946,7 @@
           <a:p>
             <a:fld id="{5BCAD085-E8A6-8845-BD4E-CB4CCA059FC4}" type="datetimeFigureOut">
               <a:rPr lang="en-US" smtClean="0"/>
-              <a:t>10/12/26</a:t>
+              <a:t>10/15/26</a:t>
             </a:fld>
             <a:endParaRPr lang="en-US"/>
           </a:p>
@@ -1349,7 +2231,7 @@
           <a:p>
             <a:fld id="{5BCAD085-E8A6-8845-BD4E-CB4CCA059FC4}" type="datetimeFigureOut">
               <a:rPr lang="en-US" smtClean="0"/>
-              <a:t>10/12/26</a:t>
+              <a:t>10/15/26</a:t>
             </a:fld>
             <a:endParaRPr lang="en-US"/>
           </a:p>
@@ -1768,7 +2650,7 @@
           <a:p>
             <a:fld id="{5BCAD085-E8A6-8845-BD4E-CB4CCA059FC4}" type="datetimeFigureOut">
               <a:rPr lang="en-US" smtClean="0"/>
-              <a:t>10/12/26</a:t>
+              <a:t>10/15/26</a:t>
             </a:fld>
             <a:endParaRPr lang="en-US"/>
           </a:p>
@@ -1885,7 +2767,7 @@
           <a:p>
             <a:fld id="{5BCAD085-E8A6-8845-BD4E-CB4CCA059FC4}" type="datetimeFigureOut">
               <a:rPr lang="en-US" smtClean="0"/>
-              <a:t>10/12/26</a:t>
+              <a:t>10/15/26</a:t>
             </a:fld>
             <a:endParaRPr lang="en-US"/>
           </a:p>
@@ -1980,7 +2862,7 @@
           <a:p>
             <a:fld id="{5BCAD085-E8A6-8845-BD4E-CB4CCA059FC4}" type="datetimeFigureOut">
               <a:rPr lang="en-US" smtClean="0"/>
-              <a:t>10/12/26</a:t>
+              <a:t>10/15/26</a:t>
             </a:fld>
             <a:endParaRPr lang="en-US"/>
           </a:p>
@@ -2255,7 +3137,7 @@
           <a:p>
             <a:fld id="{5BCAD085-E8A6-8845-BD4E-CB4CCA059FC4}" type="datetimeFigureOut">
               <a:rPr lang="en-US" smtClean="0"/>
-              <a:t>10/12/26</a:t>
+              <a:t>10/15/26</a:t>
             </a:fld>
             <a:endParaRPr lang="en-US"/>
           </a:p>
@@ -2507,7 +3389,7 @@
           <a:p>
             <a:fld id="{5BCAD085-E8A6-8845-BD4E-CB4CCA059FC4}" type="datetimeFigureOut">
               <a:rPr lang="en-US" smtClean="0"/>
-              <a:t>10/12/26</a:t>
+              <a:t>10/15/26</a:t>
             </a:fld>
             <a:endParaRPr lang="en-US"/>
           </a:p>
@@ -2718,7 +3600,7 @@
           <a:p>
             <a:fld id="{5BCAD085-E8A6-8845-BD4E-CB4CCA059FC4}" type="datetimeFigureOut">
               <a:rPr lang="en-US" smtClean="0"/>
-              <a:t>10/12/26</a:t>
+              <a:t>10/15/26</a:t>
             </a:fld>
             <a:endParaRPr lang="en-US"/>
           </a:p>
@@ -3335,7 +4217,7 @@
         <p:spPr>
           <a:xfrm>
             <a:off x="498232" y="1120259"/>
-            <a:ext cx="5029200" cy="365760"/>
+            <a:ext cx="5029200" cy="280077"/>
           </a:xfrm>
           <a:prstGeom prst="rect">
             <a:avLst/>
@@ -3350,6 +4232,26 @@
           <a:p>
             <a:pPr algn="l"/>
             <a:r>
+              <a:rPr sz="1700" b="1" dirty="0" err="1">
+                <a:solidFill>
+                  <a:srgbClr val="8A96A3"/>
+                </a:solidFill>
+                <a:latin typeface="PingFang SC"/>
+                <a:ea typeface="PingFang SC"/>
+              </a:rPr>
+              <a:t>原版</a:t>
+            </a:r>
+            <a:r>
+              <a:rPr sz="1700" b="1" err="1">
+                <a:solidFill>
+                  <a:srgbClr val="8A96A3"/>
+                </a:solidFill>
+                <a:latin typeface="PingFang SC"/>
+                <a:ea typeface="PingFang SC"/>
+              </a:rPr>
+              <a:t>：</a:t>
+            </a:r>
+            <a:r>
               <a:rPr sz="1700" b="1">
                 <a:solidFill>
                   <a:srgbClr val="8A96A3"/>
@@ -3357,7 +4259,7 @@
                 <a:latin typeface="PingFang SC"/>
                 <a:ea typeface="PingFang SC"/>
               </a:rPr>
-              <a:t>原版：共卡同步，无 TQ</a:t>
+              <a:t>共卡同步</a:t>
             </a:r>
           </a:p>
         </p:txBody>
@@ -25850,6 +26752,2201 @@
 </p:sld>
 </file>
 
+<file path=ppt/slides/slide5.xml><?xml version="1.0" encoding="utf-8"?>
+<p:sld xmlns:a="http://schemas.openxmlformats.org/drawingml/2006/main" xmlns:r="http://schemas.openxmlformats.org/officeDocument/2006/relationships" xmlns:p="http://schemas.openxmlformats.org/presentationml/2006/main">
+  <p:cSld>
+    <p:spTree>
+      <p:nvGrpSpPr>
+        <p:cNvPr id="1" name=""/>
+        <p:cNvGrpSpPr/>
+        <p:nvPr/>
+      </p:nvGrpSpPr>
+      <p:grpSpPr>
+        <a:xfrm>
+          <a:off x="0" y="0"/>
+          <a:ext cx="0" cy="0"/>
+          <a:chOff x="0" y="0"/>
+          <a:chExt cx="0" cy="0"/>
+        </a:xfrm>
+      </p:grpSpPr>
+      <p:sp>
+        <p:nvSpPr>
+          <p:cNvPr id="2" name="TextBox 1"/>
+          <p:cNvSpPr txBox="1"/>
+          <p:nvPr/>
+        </p:nvSpPr>
+        <p:spPr>
+          <a:xfrm>
+            <a:off x="457200" y="292608"/>
+            <a:ext cx="11247120" cy="548640"/>
+          </a:xfrm>
+          <a:prstGeom prst="rect">
+            <a:avLst/>
+          </a:prstGeom>
+          <a:noFill/>
+        </p:spPr>
+        <p:txBody>
+          <a:bodyPr wrap="square">
+            <a:spAutoFit/>
+          </a:bodyPr>
+          <a:lstStyle/>
+          <a:p>
+            <a:pPr algn="l"/>
+            <a:r>
+              <a:rPr sz="2600" b="1">
+                <a:solidFill>
+                  <a:srgbClr val="1F2933"/>
+                </a:solidFill>
+                <a:latin typeface="PingFang SC"/>
+              </a:rPr>
+              <a:t>每步端到端时间：共卡同步 vs TQ 分离异步</a:t>
+            </a:r>
+          </a:p>
+        </p:txBody>
+      </p:sp>
+      <p:sp>
+        <p:nvSpPr>
+          <p:cNvPr id="3" name="TextBox 2"/>
+          <p:cNvSpPr txBox="1"/>
+          <p:nvPr/>
+        </p:nvSpPr>
+        <p:spPr>
+          <a:xfrm>
+            <a:off x="457200" y="841248"/>
+            <a:ext cx="11247120" cy="274320"/>
+          </a:xfrm>
+          <a:prstGeom prst="rect">
+            <a:avLst/>
+          </a:prstGeom>
+          <a:noFill/>
+        </p:spPr>
+        <p:txBody>
+          <a:bodyPr wrap="square">
+            <a:spAutoFit/>
+          </a:bodyPr>
+          <a:lstStyle/>
+          <a:p>
+            <a:pPr algn="l"/>
+            <a:r>
+              <a:rPr sz="1300" b="0">
+                <a:solidFill>
+                  <a:srgbClr val="6B7A8A"/>
+                </a:solidFill>
+                <a:latin typeface="PingFang SC"/>
+              </a:rPr>
+              <a:t>calc_x · Qwen3-8B · 单机 16 卡昇腾 · 128 runner · 每步 512 条 rollout（batch 128 × n=4）</a:t>
+            </a:r>
+          </a:p>
+        </p:txBody>
+      </p:sp>
+      <p:graphicFrame>
+        <p:nvGraphicFramePr>
+          <p:cNvPr id="4" name="Chart 3"/>
+          <p:cNvGraphicFramePr>
+            <a:graphicFrameLocks noGrp="1"/>
+          </p:cNvGraphicFramePr>
+          <p:nvPr/>
+        </p:nvGraphicFramePr>
+        <p:xfrm>
+          <a:off x="365760" y="1280160"/>
+          <a:ext cx="7818120" cy="4846320"/>
+        </p:xfrm>
+        <a:graphic>
+          <a:graphicData uri="http://schemas.openxmlformats.org/drawingml/2006/chart">
+            <c:chart xmlns:c="http://schemas.openxmlformats.org/drawingml/2006/chart" xmlns:r="http://schemas.openxmlformats.org/officeDocument/2006/relationships" r:id="rId2"/>
+          </a:graphicData>
+        </a:graphic>
+      </p:graphicFrame>
+      <p:sp>
+        <p:nvSpPr>
+          <p:cNvPr id="5" name="Rectangle 4"/>
+          <p:cNvSpPr/>
+          <p:nvPr/>
+        </p:nvSpPr>
+        <p:spPr>
+          <a:xfrm>
+            <a:off x="8412480" y="1280160"/>
+            <a:ext cx="3319272" cy="4846320"/>
+          </a:xfrm>
+          <a:prstGeom prst="rect">
+            <a:avLst/>
+          </a:prstGeom>
+          <a:solidFill>
+            <a:srgbClr val="F4F6F8"/>
+          </a:solidFill>
+          <a:ln>
+            <a:noFill/>
+          </a:ln>
+          <a:effectLst/>
+        </p:spPr>
+        <p:style>
+          <a:lnRef idx="1">
+            <a:schemeClr val="accent1"/>
+          </a:lnRef>
+          <a:fillRef idx="3">
+            <a:schemeClr val="accent1"/>
+          </a:fillRef>
+          <a:effectRef idx="2">
+            <a:schemeClr val="accent1"/>
+          </a:effectRef>
+          <a:fontRef idx="minor">
+            <a:schemeClr val="lt1"/>
+          </a:fontRef>
+        </p:style>
+        <p:txBody>
+          <a:bodyPr rtlCol="0" anchor="ctr"/>
+          <a:lstStyle/>
+          <a:p>
+            <a:pPr algn="ctr"/>
+            <a:endParaRPr/>
+          </a:p>
+        </p:txBody>
+      </p:sp>
+      <p:sp>
+        <p:nvSpPr>
+          <p:cNvPr id="6" name="Rectangle 5"/>
+          <p:cNvSpPr/>
+          <p:nvPr/>
+        </p:nvSpPr>
+        <p:spPr>
+          <a:xfrm>
+            <a:off x="8412480" y="1280160"/>
+            <a:ext cx="73152" cy="4846320"/>
+          </a:xfrm>
+          <a:prstGeom prst="rect">
+            <a:avLst/>
+          </a:prstGeom>
+          <a:solidFill>
+            <a:srgbClr val="2C6E8F"/>
+          </a:solidFill>
+          <a:ln>
+            <a:noFill/>
+          </a:ln>
+          <a:effectLst/>
+        </p:spPr>
+        <p:style>
+          <a:lnRef idx="1">
+            <a:schemeClr val="accent1"/>
+          </a:lnRef>
+          <a:fillRef idx="3">
+            <a:schemeClr val="accent1"/>
+          </a:fillRef>
+          <a:effectRef idx="2">
+            <a:schemeClr val="accent1"/>
+          </a:effectRef>
+          <a:fontRef idx="minor">
+            <a:schemeClr val="lt1"/>
+          </a:fontRef>
+        </p:style>
+        <p:txBody>
+          <a:bodyPr rtlCol="0" anchor="ctr"/>
+          <a:lstStyle/>
+          <a:p>
+            <a:pPr algn="ctr"/>
+            <a:endParaRPr/>
+          </a:p>
+        </p:txBody>
+      </p:sp>
+      <p:sp>
+        <p:nvSpPr>
+          <p:cNvPr id="7" name="TextBox 6"/>
+          <p:cNvSpPr txBox="1"/>
+          <p:nvPr/>
+        </p:nvSpPr>
+        <p:spPr>
+          <a:xfrm>
+            <a:off x="8641080" y="1417319"/>
+            <a:ext cx="2953512" cy="274320"/>
+          </a:xfrm>
+          <a:prstGeom prst="rect">
+            <a:avLst/>
+          </a:prstGeom>
+          <a:noFill/>
+        </p:spPr>
+        <p:txBody>
+          <a:bodyPr wrap="square">
+            <a:spAutoFit/>
+          </a:bodyPr>
+          <a:lstStyle/>
+          <a:p>
+            <a:pPr algn="l"/>
+            <a:r>
+              <a:rPr sz="1100" b="0">
+                <a:solidFill>
+                  <a:srgbClr val="6B7A8A"/>
+                </a:solidFill>
+                <a:latin typeface="PingFang SC"/>
+              </a:rPr>
+              <a:t>平均每步</a:t>
+            </a:r>
+          </a:p>
+        </p:txBody>
+      </p:sp>
+      <p:sp>
+        <p:nvSpPr>
+          <p:cNvPr id="8" name="TextBox 7"/>
+          <p:cNvSpPr txBox="1"/>
+          <p:nvPr/>
+        </p:nvSpPr>
+        <p:spPr>
+          <a:xfrm>
+            <a:off x="8641080" y="1664207"/>
+            <a:ext cx="2953512" cy="502920"/>
+          </a:xfrm>
+          <a:prstGeom prst="rect">
+            <a:avLst/>
+          </a:prstGeom>
+          <a:noFill/>
+        </p:spPr>
+        <p:txBody>
+          <a:bodyPr wrap="square">
+            <a:spAutoFit/>
+          </a:bodyPr>
+          <a:lstStyle/>
+          <a:p>
+            <a:pPr algn="l"/>
+            <a:r>
+              <a:rPr sz="2200" b="1">
+                <a:solidFill>
+                  <a:srgbClr val="8A96A3"/>
+                </a:solidFill>
+                <a:latin typeface="PingFang SC"/>
+              </a:rPr>
+              <a:t>314.0</a:t>
+            </a:r>
+            <a:r>
+              <a:rPr sz="1600" b="0">
+                <a:solidFill>
+                  <a:srgbClr val="6B7A8A"/>
+                </a:solidFill>
+                <a:latin typeface="PingFang SC"/>
+              </a:rPr>
+              <a:t> → </a:t>
+            </a:r>
+            <a:r>
+              <a:rPr sz="2200" b="1">
+                <a:solidFill>
+                  <a:srgbClr val="2C6E8F"/>
+                </a:solidFill>
+                <a:latin typeface="PingFang SC"/>
+              </a:rPr>
+              <a:t>247.3 s</a:t>
+            </a:r>
+          </a:p>
+        </p:txBody>
+      </p:sp>
+      <p:sp>
+        <p:nvSpPr>
+          <p:cNvPr id="9" name="TextBox 8"/>
+          <p:cNvSpPr txBox="1"/>
+          <p:nvPr/>
+        </p:nvSpPr>
+        <p:spPr>
+          <a:xfrm>
+            <a:off x="8641080" y="2148839"/>
+            <a:ext cx="2953512" cy="274320"/>
+          </a:xfrm>
+          <a:prstGeom prst="rect">
+            <a:avLst/>
+          </a:prstGeom>
+          <a:noFill/>
+        </p:spPr>
+        <p:txBody>
+          <a:bodyPr wrap="square">
+            <a:spAutoFit/>
+          </a:bodyPr>
+          <a:lstStyle/>
+          <a:p>
+            <a:pPr algn="l"/>
+            <a:r>
+              <a:rPr sz="1100" b="1">
+                <a:solidFill>
+                  <a:srgbClr val="2C6E8F"/>
+                </a:solidFill>
+                <a:latin typeface="PingFang SC"/>
+              </a:rPr>
+              <a:t>缩短 21%</a:t>
+            </a:r>
+          </a:p>
+        </p:txBody>
+      </p:sp>
+      <p:sp>
+        <p:nvSpPr>
+          <p:cNvPr id="10" name="TextBox 9"/>
+          <p:cNvSpPr txBox="1"/>
+          <p:nvPr/>
+        </p:nvSpPr>
+        <p:spPr>
+          <a:xfrm>
+            <a:off x="8641080" y="2560320"/>
+            <a:ext cx="2953512" cy="274320"/>
+          </a:xfrm>
+          <a:prstGeom prst="rect">
+            <a:avLst/>
+          </a:prstGeom>
+          <a:noFill/>
+        </p:spPr>
+        <p:txBody>
+          <a:bodyPr wrap="square">
+            <a:spAutoFit/>
+          </a:bodyPr>
+          <a:lstStyle/>
+          <a:p>
+            <a:pPr algn="l"/>
+            <a:r>
+              <a:rPr sz="1100" b="0">
+                <a:solidFill>
+                  <a:srgbClr val="6B7A8A"/>
+                </a:solidFill>
+                <a:latin typeface="PingFang SC"/>
+              </a:rPr>
+              <a:t>吞吐（训练用 response token / s）</a:t>
+            </a:r>
+          </a:p>
+        </p:txBody>
+      </p:sp>
+      <p:sp>
+        <p:nvSpPr>
+          <p:cNvPr id="11" name="TextBox 10"/>
+          <p:cNvSpPr txBox="1"/>
+          <p:nvPr/>
+        </p:nvSpPr>
+        <p:spPr>
+          <a:xfrm>
+            <a:off x="8641080" y="2807208"/>
+            <a:ext cx="2953512" cy="502920"/>
+          </a:xfrm>
+          <a:prstGeom prst="rect">
+            <a:avLst/>
+          </a:prstGeom>
+          <a:noFill/>
+        </p:spPr>
+        <p:txBody>
+          <a:bodyPr wrap="square">
+            <a:spAutoFit/>
+          </a:bodyPr>
+          <a:lstStyle/>
+          <a:p>
+            <a:pPr algn="l"/>
+            <a:r>
+              <a:rPr sz="2200" b="1">
+                <a:solidFill>
+                  <a:srgbClr val="8A96A3"/>
+                </a:solidFill>
+                <a:latin typeface="PingFang SC"/>
+              </a:rPr>
+              <a:t>2229</a:t>
+            </a:r>
+            <a:r>
+              <a:rPr sz="1600" b="0">
+                <a:solidFill>
+                  <a:srgbClr val="6B7A8A"/>
+                </a:solidFill>
+                <a:latin typeface="PingFang SC"/>
+              </a:rPr>
+              <a:t> → </a:t>
+            </a:r>
+            <a:r>
+              <a:rPr sz="2200" b="1">
+                <a:solidFill>
+                  <a:srgbClr val="2C6E8F"/>
+                </a:solidFill>
+                <a:latin typeface="PingFang SC"/>
+              </a:rPr>
+              <a:t>2770</a:t>
+            </a:r>
+          </a:p>
+        </p:txBody>
+      </p:sp>
+      <p:sp>
+        <p:nvSpPr>
+          <p:cNvPr id="12" name="TextBox 11"/>
+          <p:cNvSpPr txBox="1"/>
+          <p:nvPr/>
+        </p:nvSpPr>
+        <p:spPr>
+          <a:xfrm>
+            <a:off x="8641080" y="3291840"/>
+            <a:ext cx="2953512" cy="274320"/>
+          </a:xfrm>
+          <a:prstGeom prst="rect">
+            <a:avLst/>
+          </a:prstGeom>
+          <a:noFill/>
+        </p:spPr>
+        <p:txBody>
+          <a:bodyPr wrap="square">
+            <a:spAutoFit/>
+          </a:bodyPr>
+          <a:lstStyle/>
+          <a:p>
+            <a:pPr algn="l"/>
+            <a:r>
+              <a:rPr sz="1100" b="1">
+                <a:solidFill>
+                  <a:srgbClr val="2C6E8F"/>
+                </a:solidFill>
+                <a:latin typeface="PingFang SC"/>
+              </a:rPr>
+              <a:t>1.24×</a:t>
+            </a:r>
+          </a:p>
+        </p:txBody>
+      </p:sp>
+      <p:sp>
+        <p:nvSpPr>
+          <p:cNvPr id="13" name="TextBox 12"/>
+          <p:cNvSpPr txBox="1"/>
+          <p:nvPr/>
+        </p:nvSpPr>
+        <p:spPr>
+          <a:xfrm>
+            <a:off x="8641080" y="3749039"/>
+            <a:ext cx="2953512" cy="2286000"/>
+          </a:xfrm>
+          <a:prstGeom prst="rect">
+            <a:avLst/>
+          </a:prstGeom>
+          <a:noFill/>
+        </p:spPr>
+        <p:txBody>
+          <a:bodyPr wrap="square">
+            <a:spAutoFit/>
+          </a:bodyPr>
+          <a:lstStyle/>
+          <a:p>
+            <a:pPr algn="l"/>
+            <a:r>
+              <a:rPr sz="1050" b="1">
+                <a:solidFill>
+                  <a:srgbClr val="1F2933"/>
+                </a:solidFill>
+                <a:latin typeface="PingFang SC"/>
+              </a:rPr>
+              <a:t>共卡同步：</a:t>
+            </a:r>
+            <a:r>
+              <a:rPr sz="1050" b="0">
+                <a:solidFill>
+                  <a:srgbClr val="1F2933"/>
+                </a:solidFill>
+                <a:latin typeface="PingFang SC"/>
+              </a:rPr>
+              <a:t>每步都要等 512 条 rollout 全部跑完再训练，生成、sleep、训练串行，每步稳定在 294–327 s。</a:t>
+            </a:r>
+          </a:p>
+          <a:p>
+            <a:pPr algn="l"/>
+            <a:endParaRPr sz="1050" b="0">
+              <a:solidFill>
+                <a:srgbClr val="1F2933"/>
+              </a:solidFill>
+              <a:latin typeface="PingFang SC"/>
+            </a:endParaRPr>
+          </a:p>
+          <a:p>
+            <a:pPr algn="l"/>
+            <a:r>
+              <a:rPr sz="1050" b="1">
+                <a:solidFill>
+                  <a:srgbClr val="1F2933"/>
+                </a:solidFill>
+                <a:latin typeface="PingFang SC"/>
+              </a:rPr>
+              <a:t>TQ 分离异步：</a:t>
+            </a:r>
+            <a:r>
+              <a:rPr sz="1050" b="0">
+                <a:solidFill>
+                  <a:srgbClr val="1F2933"/>
+                </a:solidFill>
+                <a:latin typeface="PingFang SC"/>
+              </a:rPr>
+              <a:t>每次权重同步都会中断正在生成的回答。若下一批正有大量组在生成，这批被中断续写、整体变长，训练卡要多等；等它的同时再下一批已基本生成完，下一步几乎不用等。于是每步时间一大一小交替，在 101–440 s 之间，平均仍比共卡短。</a:t>
+            </a:r>
+          </a:p>
+        </p:txBody>
+      </p:sp>
+      <p:sp>
+        <p:nvSpPr>
+          <p:cNvPr id="14" name="TextBox 13"/>
+          <p:cNvSpPr txBox="1"/>
+          <p:nvPr/>
+        </p:nvSpPr>
+        <p:spPr>
+          <a:xfrm>
+            <a:off x="457200" y="6263640"/>
+            <a:ext cx="11247120" cy="320040"/>
+          </a:xfrm>
+          <a:prstGeom prst="rect">
+            <a:avLst/>
+          </a:prstGeom>
+          <a:noFill/>
+        </p:spPr>
+        <p:txBody>
+          <a:bodyPr wrap="square">
+            <a:spAutoFit/>
+          </a:bodyPr>
+          <a:lstStyle/>
+          <a:p>
+            <a:pPr algn="l"/>
+            <a:r>
+              <a:rPr sz="1000" b="0">
+                <a:solidFill>
+                  <a:srgbClr val="6B7A8A"/>
+                </a:solidFill>
+                <a:latin typeface="PingFang SC"/>
+              </a:rPr>
+              <a:t>每步端到端时间 = 相邻两步 step 日志的时间戳差，含生成、训练、权重同步 / sleep 等全部开销；step 1 含预热，未计入。TQ 分离异步各步为推算值。</a:t>
+            </a:r>
+          </a:p>
+        </p:txBody>
+      </p:sp>
+    </p:spTree>
+  </p:cSld>
+  <p:clrMapOvr>
+    <a:masterClrMapping/>
+  </p:clrMapOvr>
+</p:sld>
+</file>
+
+<file path=ppt/slides/slide6.xml><?xml version="1.0" encoding="utf-8"?>
+<p:sld xmlns:a="http://schemas.openxmlformats.org/drawingml/2006/main" xmlns:p="http://schemas.openxmlformats.org/presentationml/2006/main" xmlns:r="http://schemas.openxmlformats.org/officeDocument/2006/relationships">
+  <p:cSld>
+    <p:spTree>
+      <p:nvGrpSpPr>
+        <p:cNvPr id="1" name=""/>
+        <p:cNvGrpSpPr/>
+        <p:nvPr/>
+      </p:nvGrpSpPr>
+      <p:grpSpPr/>
+      <p:sp>
+        <p:nvSpPr>
+          <p:cNvPr id="2" name="TextBox 1"/>
+          <p:cNvSpPr txBox="1"/>
+          <p:nvPr/>
+        </p:nvSpPr>
+        <p:spPr>
+          <a:xfrm>
+            <a:off x="457200" y="292608"/>
+            <a:ext cx="11247120" cy="548640"/>
+          </a:xfrm>
+          <a:prstGeom prst="rect">
+            <a:avLst/>
+          </a:prstGeom>
+          <a:noFill/>
+        </p:spPr>
+        <p:txBody>
+          <a:bodyPr wrap="square" anchor="t" lIns="18288" rIns="18288" tIns="18288" bIns="18288">
+            <a:spAutoFit/>
+          </a:bodyPr>
+          <a:lstStyle/>
+          <a:p>
+            <a:pPr algn="l">
+              <a:lnSpc>
+                <a:spcPct val="110000"/>
+              </a:lnSpc>
+            </a:pPr>
+            <a:r>
+              <a:rPr sz="2600" b="1">
+                <a:solidFill>
+                  <a:srgbClr val="1F2933"/>
+                </a:solidFill>
+                <a:latin typeface="PingFang SC"/>
+              </a:rPr>
+              <a:t>我们解决的问题：性能瓶颈与并发缺陷</a:t>
+            </a:r>
+          </a:p>
+        </p:txBody>
+      </p:sp>
+      <p:sp>
+        <p:nvSpPr>
+          <p:cNvPr id="3" name="TextBox 2"/>
+          <p:cNvSpPr txBox="1"/>
+          <p:nvPr/>
+        </p:nvSpPr>
+        <p:spPr>
+          <a:xfrm>
+            <a:off x="457200" y="841248"/>
+            <a:ext cx="11247120" cy="274320"/>
+          </a:xfrm>
+          <a:prstGeom prst="rect">
+            <a:avLst/>
+          </a:prstGeom>
+          <a:noFill/>
+        </p:spPr>
+        <p:txBody>
+          <a:bodyPr wrap="square" anchor="t" lIns="18288" rIns="18288" tIns="18288" bIns="18288">
+            <a:spAutoFit/>
+          </a:bodyPr>
+          <a:lstStyle/>
+          <a:p>
+            <a:pPr algn="l">
+              <a:lnSpc>
+                <a:spcPct val="110000"/>
+              </a:lnSpc>
+            </a:pPr>
+            <a:r>
+              <a:rPr sz="1300" b="0">
+                <a:solidFill>
+                  <a:srgbClr val="6B7A8A"/>
+                </a:solidFill>
+                <a:latin typeface="PingFang SC"/>
+              </a:rPr>
+              <a:t>每项列出现象、根因、修复和实测效果。左边两项拖慢了训练和 TQ 读写，右边两组会让数据丢失、训练崩溃或卡死。</a:t>
+            </a:r>
+          </a:p>
+        </p:txBody>
+      </p:sp>
+      <p:sp>
+        <p:nvSpPr>
+          <p:cNvPr id="4" name="Rectangle 3"/>
+          <p:cNvSpPr/>
+          <p:nvPr/>
+        </p:nvSpPr>
+        <p:spPr>
+          <a:xfrm>
+            <a:off x="457200" y="1261872"/>
+            <a:ext cx="4617720" cy="2432304"/>
+          </a:xfrm>
+          <a:prstGeom prst="rect">
+            <a:avLst/>
+          </a:prstGeom>
+          <a:solidFill>
+            <a:srgbClr val="F4F6F8"/>
+          </a:solidFill>
+          <a:ln>
+            <a:noFill/>
+          </a:ln>
+          <a:effectLst/>
+        </p:spPr>
+        <p:style>
+          <a:lnRef idx="1">
+            <a:schemeClr val="accent1"/>
+          </a:lnRef>
+          <a:fillRef idx="3">
+            <a:schemeClr val="accent1"/>
+          </a:fillRef>
+          <a:effectRef idx="2">
+            <a:schemeClr val="accent1"/>
+          </a:effectRef>
+          <a:fontRef idx="minor">
+            <a:schemeClr val="lt1"/>
+          </a:fontRef>
+        </p:style>
+        <p:txBody>
+          <a:bodyPr rtlCol="0" anchor="ctr"/>
+          <a:lstStyle/>
+          <a:p>
+            <a:pPr algn="ctr"/>
+          </a:p>
+        </p:txBody>
+      </p:sp>
+      <p:sp>
+        <p:nvSpPr>
+          <p:cNvPr id="5" name="Rectangle 4"/>
+          <p:cNvSpPr/>
+          <p:nvPr/>
+        </p:nvSpPr>
+        <p:spPr>
+          <a:xfrm>
+            <a:off x="457200" y="1261872"/>
+            <a:ext cx="64008" cy="2432304"/>
+          </a:xfrm>
+          <a:prstGeom prst="rect">
+            <a:avLst/>
+          </a:prstGeom>
+          <a:solidFill>
+            <a:srgbClr val="2C6E8F"/>
+          </a:solidFill>
+          <a:ln>
+            <a:noFill/>
+          </a:ln>
+          <a:effectLst/>
+        </p:spPr>
+        <p:style>
+          <a:lnRef idx="1">
+            <a:schemeClr val="accent1"/>
+          </a:lnRef>
+          <a:fillRef idx="3">
+            <a:schemeClr val="accent1"/>
+          </a:fillRef>
+          <a:effectRef idx="2">
+            <a:schemeClr val="accent1"/>
+          </a:effectRef>
+          <a:fontRef idx="minor">
+            <a:schemeClr val="lt1"/>
+          </a:fontRef>
+        </p:style>
+        <p:txBody>
+          <a:bodyPr rtlCol="0" anchor="ctr"/>
+          <a:lstStyle/>
+          <a:p>
+            <a:pPr algn="ctr"/>
+          </a:p>
+        </p:txBody>
+      </p:sp>
+      <p:sp>
+        <p:nvSpPr>
+          <p:cNvPr id="6" name="Rounded Rectangle 5"/>
+          <p:cNvSpPr/>
+          <p:nvPr/>
+        </p:nvSpPr>
+        <p:spPr>
+          <a:xfrm>
+            <a:off x="658368" y="1417319"/>
+            <a:ext cx="438912" cy="237744"/>
+          </a:xfrm>
+          <a:prstGeom prst="roundRect">
+            <a:avLst/>
+          </a:prstGeom>
+          <a:solidFill>
+            <a:srgbClr val="2C6E8F"/>
+          </a:solidFill>
+          <a:ln>
+            <a:noFill/>
+          </a:ln>
+          <a:effectLst/>
+        </p:spPr>
+        <p:style>
+          <a:lnRef idx="1">
+            <a:schemeClr val="accent1"/>
+          </a:lnRef>
+          <a:fillRef idx="3">
+            <a:schemeClr val="accent1"/>
+          </a:fillRef>
+          <a:effectRef idx="2">
+            <a:schemeClr val="accent1"/>
+          </a:effectRef>
+          <a:fontRef idx="minor">
+            <a:schemeClr val="lt1"/>
+          </a:fontRef>
+        </p:style>
+        <p:txBody>
+          <a:bodyPr rtlCol="0" anchor="ctr" lIns="0" rIns="0" tIns="0" bIns="0"/>
+          <a:lstStyle/>
+          <a:p>
+            <a:pPr algn="ctr"/>
+            <a:r>
+              <a:rPr sz="950" b="1">
+                <a:solidFill>
+                  <a:srgbClr val="FFFFFF"/>
+                </a:solidFill>
+                <a:latin typeface="PingFang SC"/>
+              </a:rPr>
+              <a:t>性能</a:t>
+            </a:r>
+          </a:p>
+        </p:txBody>
+      </p:sp>
+      <p:sp>
+        <p:nvSpPr>
+          <p:cNvPr id="7" name="TextBox 6"/>
+          <p:cNvSpPr txBox="1"/>
+          <p:nvPr/>
+        </p:nvSpPr>
+        <p:spPr>
+          <a:xfrm>
+            <a:off x="1188720" y="1371600"/>
+            <a:ext cx="3703320" cy="329184"/>
+          </a:xfrm>
+          <a:prstGeom prst="rect">
+            <a:avLst/>
+          </a:prstGeom>
+          <a:noFill/>
+        </p:spPr>
+        <p:txBody>
+          <a:bodyPr wrap="square" anchor="t" lIns="18288" rIns="18288" tIns="18288" bIns="18288">
+            <a:spAutoFit/>
+          </a:bodyPr>
+          <a:lstStyle/>
+          <a:p>
+            <a:pPr algn="l">
+              <a:lnSpc>
+                <a:spcPct val="110000"/>
+              </a:lnSpc>
+            </a:pPr>
+            <a:r>
+              <a:rPr sz="1400" b="1">
+                <a:solidFill>
+                  <a:srgbClr val="1F2933"/>
+                </a:solidFill>
+                <a:latin typeface="PingFang SC"/>
+              </a:rPr>
+              <a:t>TQ 版 update_actor 异常变慢</a:t>
+            </a:r>
+          </a:p>
+        </p:txBody>
+      </p:sp>
+      <p:sp>
+        <p:nvSpPr>
+          <p:cNvPr id="8" name="TextBox 7"/>
+          <p:cNvSpPr txBox="1"/>
+          <p:nvPr/>
+        </p:nvSpPr>
+        <p:spPr>
+          <a:xfrm>
+            <a:off x="658368" y="1737360"/>
+            <a:ext cx="4251959" cy="1298448"/>
+          </a:xfrm>
+          <a:prstGeom prst="rect">
+            <a:avLst/>
+          </a:prstGeom>
+          <a:noFill/>
+        </p:spPr>
+        <p:txBody>
+          <a:bodyPr wrap="square" anchor="t" lIns="18288" rIns="18288" tIns="18288" bIns="18288">
+            <a:spAutoFit/>
+          </a:bodyPr>
+          <a:lstStyle/>
+          <a:p>
+            <a:pPr algn="l">
+              <a:lnSpc>
+                <a:spcPct val="110000"/>
+              </a:lnSpc>
+            </a:pPr>
+            <a:r>
+              <a:rPr sz="1000" b="1">
+                <a:solidFill>
+                  <a:srgbClr val="2C6E8F"/>
+                </a:solidFill>
+                <a:latin typeface="PingFang SC"/>
+              </a:rPr>
+              <a:t>现象  </a:t>
+            </a:r>
+            <a:r>
+              <a:rPr sz="1000" b="0">
+                <a:solidFill>
+                  <a:srgbClr val="1F2933"/>
+                </a:solidFill>
+                <a:latin typeface="PingFang SC"/>
+              </a:rPr>
+              <a:t>update_actor 72.4 s，无 TQ 只要 56.8 s；batch 512 时 old_log_prob / ref / update_actor 都慢 40%–50%。</a:t>
+            </a:r>
+          </a:p>
+          <a:p>
+            <a:pPr algn="l">
+              <a:lnSpc>
+                <a:spcPct val="110000"/>
+              </a:lnSpc>
+              <a:spcBef>
+                <a:spcPts val="300"/>
+              </a:spcBef>
+            </a:pPr>
+            <a:r>
+              <a:rPr sz="1000" b="1">
+                <a:solidFill>
+                  <a:srgbClr val="2C6E8F"/>
+                </a:solidFill>
+                <a:latin typeface="PingFang SC"/>
+              </a:rPr>
+              <a:t>根因  </a:t>
+            </a:r>
+            <a:r>
+              <a:rPr sz="1000" b="0">
+                <a:solidFill>
+                  <a:srgbClr val="1F2933"/>
+                </a:solidFill>
+                <a:latin typeface="PingFang SC"/>
+              </a:rPr>
+              <a:t>verl v1 的 _balance_batch 只把数据均分到各 dp rank，不按长度排序。各 rank 同一个 micro-batch 长短不一，FSDP 每个 micro-batch 都要等最慢的 rank。</a:t>
+            </a:r>
+          </a:p>
+          <a:p>
+            <a:pPr algn="l">
+              <a:lnSpc>
+                <a:spcPct val="110000"/>
+              </a:lnSpc>
+              <a:spcBef>
+                <a:spcPts val="300"/>
+              </a:spcBef>
+            </a:pPr>
+            <a:r>
+              <a:rPr sz="1000" b="1">
+                <a:solidFill>
+                  <a:srgbClr val="2C6E8F"/>
+                </a:solidFill>
+                <a:latin typeface="PingFang SC"/>
+              </a:rPr>
+              <a:t>修复  </a:t>
+            </a:r>
+            <a:r>
+              <a:rPr sz="1000" b="0">
+                <a:solidFill>
+                  <a:srgbClr val="1F2933"/>
+                </a:solidFill>
+                <a:latin typeface="PingFang SC"/>
+              </a:rPr>
+              <a:t>沿用 verl v0 的做法，每个 rank 内按长度排成短-长-短。</a:t>
+            </a:r>
+          </a:p>
+        </p:txBody>
+      </p:sp>
+      <p:sp>
+        <p:nvSpPr>
+          <p:cNvPr id="9" name="Rounded Rectangle 8"/>
+          <p:cNvSpPr/>
+          <p:nvPr/>
+        </p:nvSpPr>
+        <p:spPr>
+          <a:xfrm>
+            <a:off x="658368" y="2999232"/>
+            <a:ext cx="4251959" cy="566928"/>
+          </a:xfrm>
+          <a:prstGeom prst="roundRect">
+            <a:avLst/>
+          </a:prstGeom>
+          <a:solidFill>
+            <a:srgbClr val="FFFFFF"/>
+          </a:solidFill>
+          <a:ln>
+            <a:noFill/>
+          </a:ln>
+          <a:effectLst/>
+        </p:spPr>
+        <p:style>
+          <a:lnRef idx="1">
+            <a:schemeClr val="accent1"/>
+          </a:lnRef>
+          <a:fillRef idx="3">
+            <a:schemeClr val="accent1"/>
+          </a:fillRef>
+          <a:effectRef idx="2">
+            <a:schemeClr val="accent1"/>
+          </a:effectRef>
+          <a:fontRef idx="minor">
+            <a:schemeClr val="lt1"/>
+          </a:fontRef>
+        </p:style>
+        <p:txBody>
+          <a:bodyPr rtlCol="0" anchor="ctr"/>
+          <a:lstStyle/>
+          <a:p>
+            <a:pPr algn="ctr"/>
+          </a:p>
+        </p:txBody>
+      </p:sp>
+      <p:sp>
+        <p:nvSpPr>
+          <p:cNvPr id="10" name="TextBox 9"/>
+          <p:cNvSpPr txBox="1"/>
+          <p:nvPr/>
+        </p:nvSpPr>
+        <p:spPr>
+          <a:xfrm>
+            <a:off x="795528" y="3035808"/>
+            <a:ext cx="3977639" cy="512064"/>
+          </a:xfrm>
+          <a:prstGeom prst="rect">
+            <a:avLst/>
+          </a:prstGeom>
+          <a:noFill/>
+        </p:spPr>
+        <p:txBody>
+          <a:bodyPr wrap="square" anchor="ctr" lIns="18288" rIns="18288" tIns="18288" bIns="18288">
+            <a:spAutoFit/>
+          </a:bodyPr>
+          <a:lstStyle/>
+          <a:p>
+            <a:pPr algn="l">
+              <a:lnSpc>
+                <a:spcPct val="100000"/>
+              </a:lnSpc>
+            </a:pPr>
+            <a:r>
+              <a:rPr sz="1700" b="1">
+                <a:solidFill>
+                  <a:srgbClr val="2C6E8F"/>
+                </a:solidFill>
+                <a:latin typeface="PingFang SC"/>
+              </a:rPr>
+              <a:t>72.4 → 55.8 s</a:t>
+            </a:r>
+          </a:p>
+          <a:p>
+            <a:pPr algn="l">
+              <a:lnSpc>
+                <a:spcPct val="100000"/>
+              </a:lnSpc>
+            </a:pPr>
+            <a:r>
+              <a:rPr sz="950" b="0">
+                <a:solidFill>
+                  <a:srgbClr val="6B7A8A"/>
+                </a:solidFill>
+                <a:latin typeface="PingFang SC"/>
+              </a:rPr>
+              <a:t>update_actor，与无 TQ（56.6 s）持平</a:t>
+            </a:r>
+          </a:p>
+        </p:txBody>
+      </p:sp>
+      <p:sp>
+        <p:nvSpPr>
+          <p:cNvPr id="11" name="Rectangle 10"/>
+          <p:cNvSpPr/>
+          <p:nvPr/>
+        </p:nvSpPr>
+        <p:spPr>
+          <a:xfrm>
+            <a:off x="457200" y="3803904"/>
+            <a:ext cx="4617720" cy="2432304"/>
+          </a:xfrm>
+          <a:prstGeom prst="rect">
+            <a:avLst/>
+          </a:prstGeom>
+          <a:solidFill>
+            <a:srgbClr val="F4F6F8"/>
+          </a:solidFill>
+          <a:ln>
+            <a:noFill/>
+          </a:ln>
+          <a:effectLst/>
+        </p:spPr>
+        <p:style>
+          <a:lnRef idx="1">
+            <a:schemeClr val="accent1"/>
+          </a:lnRef>
+          <a:fillRef idx="3">
+            <a:schemeClr val="accent1"/>
+          </a:fillRef>
+          <a:effectRef idx="2">
+            <a:schemeClr val="accent1"/>
+          </a:effectRef>
+          <a:fontRef idx="minor">
+            <a:schemeClr val="lt1"/>
+          </a:fontRef>
+        </p:style>
+        <p:txBody>
+          <a:bodyPr rtlCol="0" anchor="ctr"/>
+          <a:lstStyle/>
+          <a:p>
+            <a:pPr algn="ctr"/>
+          </a:p>
+        </p:txBody>
+      </p:sp>
+      <p:sp>
+        <p:nvSpPr>
+          <p:cNvPr id="12" name="Rectangle 11"/>
+          <p:cNvSpPr/>
+          <p:nvPr/>
+        </p:nvSpPr>
+        <p:spPr>
+          <a:xfrm>
+            <a:off x="457200" y="3803904"/>
+            <a:ext cx="64008" cy="2432304"/>
+          </a:xfrm>
+          <a:prstGeom prst="rect">
+            <a:avLst/>
+          </a:prstGeom>
+          <a:solidFill>
+            <a:srgbClr val="2C6E8F"/>
+          </a:solidFill>
+          <a:ln>
+            <a:noFill/>
+          </a:ln>
+          <a:effectLst/>
+        </p:spPr>
+        <p:style>
+          <a:lnRef idx="1">
+            <a:schemeClr val="accent1"/>
+          </a:lnRef>
+          <a:fillRef idx="3">
+            <a:schemeClr val="accent1"/>
+          </a:fillRef>
+          <a:effectRef idx="2">
+            <a:schemeClr val="accent1"/>
+          </a:effectRef>
+          <a:fontRef idx="minor">
+            <a:schemeClr val="lt1"/>
+          </a:fontRef>
+        </p:style>
+        <p:txBody>
+          <a:bodyPr rtlCol="0" anchor="ctr"/>
+          <a:lstStyle/>
+          <a:p>
+            <a:pPr algn="ctr"/>
+          </a:p>
+        </p:txBody>
+      </p:sp>
+      <p:sp>
+        <p:nvSpPr>
+          <p:cNvPr id="13" name="Rounded Rectangle 12"/>
+          <p:cNvSpPr/>
+          <p:nvPr/>
+        </p:nvSpPr>
+        <p:spPr>
+          <a:xfrm>
+            <a:off x="658368" y="3959352"/>
+            <a:ext cx="438912" cy="237744"/>
+          </a:xfrm>
+          <a:prstGeom prst="roundRect">
+            <a:avLst/>
+          </a:prstGeom>
+          <a:solidFill>
+            <a:srgbClr val="2C6E8F"/>
+          </a:solidFill>
+          <a:ln>
+            <a:noFill/>
+          </a:ln>
+          <a:effectLst/>
+        </p:spPr>
+        <p:style>
+          <a:lnRef idx="1">
+            <a:schemeClr val="accent1"/>
+          </a:lnRef>
+          <a:fillRef idx="3">
+            <a:schemeClr val="accent1"/>
+          </a:fillRef>
+          <a:effectRef idx="2">
+            <a:schemeClr val="accent1"/>
+          </a:effectRef>
+          <a:fontRef idx="minor">
+            <a:schemeClr val="lt1"/>
+          </a:fontRef>
+        </p:style>
+        <p:txBody>
+          <a:bodyPr rtlCol="0" anchor="ctr" lIns="0" rIns="0" tIns="0" bIns="0"/>
+          <a:lstStyle/>
+          <a:p>
+            <a:pPr algn="ctr"/>
+            <a:r>
+              <a:rPr sz="950" b="1">
+                <a:solidFill>
+                  <a:srgbClr val="FFFFFF"/>
+                </a:solidFill>
+                <a:latin typeface="PingFang SC"/>
+              </a:rPr>
+              <a:t>性能</a:t>
+            </a:r>
+          </a:p>
+        </p:txBody>
+      </p:sp>
+      <p:sp>
+        <p:nvSpPr>
+          <p:cNvPr id="14" name="TextBox 13"/>
+          <p:cNvSpPr txBox="1"/>
+          <p:nvPr/>
+        </p:nvSpPr>
+        <p:spPr>
+          <a:xfrm>
+            <a:off x="1188720" y="3913632"/>
+            <a:ext cx="3703320" cy="329184"/>
+          </a:xfrm>
+          <a:prstGeom prst="rect">
+            <a:avLst/>
+          </a:prstGeom>
+          <a:noFill/>
+        </p:spPr>
+        <p:txBody>
+          <a:bodyPr wrap="square" anchor="t" lIns="18288" rIns="18288" tIns="18288" bIns="18288">
+            <a:spAutoFit/>
+          </a:bodyPr>
+          <a:lstStyle/>
+          <a:p>
+            <a:pPr algn="l">
+              <a:lnSpc>
+                <a:spcPct val="110000"/>
+              </a:lnSpc>
+            </a:pPr>
+            <a:r>
+              <a:rPr sz="1400" b="1">
+                <a:solidFill>
+                  <a:srgbClr val="1F2933"/>
+                </a:solidFill>
+                <a:latin typeface="PingFang SC"/>
+              </a:rPr>
+              <a:t>TQ 每次 put / get 都重新数一遍 CPU 核</a:t>
+            </a:r>
+          </a:p>
+        </p:txBody>
+      </p:sp>
+      <p:sp>
+        <p:nvSpPr>
+          <p:cNvPr id="15" name="TextBox 14"/>
+          <p:cNvSpPr txBox="1"/>
+          <p:nvPr/>
+        </p:nvSpPr>
+        <p:spPr>
+          <a:xfrm>
+            <a:off x="658368" y="4279392"/>
+            <a:ext cx="4251959" cy="1298448"/>
+          </a:xfrm>
+          <a:prstGeom prst="rect">
+            <a:avLst/>
+          </a:prstGeom>
+          <a:noFill/>
+        </p:spPr>
+        <p:txBody>
+          <a:bodyPr wrap="square" anchor="t" lIns="18288" rIns="18288" tIns="18288" bIns="18288">
+            <a:spAutoFit/>
+          </a:bodyPr>
+          <a:lstStyle/>
+          <a:p>
+            <a:pPr algn="l">
+              <a:lnSpc>
+                <a:spcPct val="110000"/>
+              </a:lnSpc>
+            </a:pPr>
+            <a:r>
+              <a:rPr sz="1000" b="1">
+                <a:solidFill>
+                  <a:srgbClr val="2C6E8F"/>
+                </a:solidFill>
+                <a:latin typeface="PingFang SC"/>
+              </a:rPr>
+              <a:t>现象  </a:t>
+            </a:r>
+            <a:r>
+              <a:rPr sz="1000" b="0">
+                <a:solidFill>
+                  <a:srgbClr val="1F2933"/>
+                </a:solidFill>
+                <a:latin typeface="PingFang SC"/>
+              </a:rPr>
+              <a:t>storage unit 单次 PUT 从 11 ms 涨到 80–120 ms，单线程忙碌 70%–75%。</a:t>
+            </a:r>
+          </a:p>
+          <a:p>
+            <a:pPr algn="l">
+              <a:lnSpc>
+                <a:spcPct val="110000"/>
+              </a:lnSpc>
+              <a:spcBef>
+                <a:spcPts val="300"/>
+              </a:spcBef>
+            </a:pPr>
+            <a:r>
+              <a:rPr sz="1000" b="1">
+                <a:solidFill>
+                  <a:srgbClr val="2C6E8F"/>
+                </a:solidFill>
+                <a:latin typeface="PingFang SC"/>
+              </a:rPr>
+              <a:t>根因  </a:t>
+            </a:r>
+            <a:r>
+              <a:rPr sz="1000" b="0">
+                <a:solidFill>
+                  <a:srgbClr val="1F2933"/>
+                </a:solidFill>
+                <a:latin typeface="PingFang SC"/>
+              </a:rPr>
+              <a:t>TQ 每次读写都调用 psutil.cpu_count(logical=False)。node10 有 640 个逻辑核，训练时内核读 sysfs 拓扑互相争用，单次 115 ms。</a:t>
+            </a:r>
+          </a:p>
+          <a:p>
+            <a:pPr algn="l">
+              <a:lnSpc>
+                <a:spcPct val="110000"/>
+              </a:lnSpc>
+              <a:spcBef>
+                <a:spcPts val="300"/>
+              </a:spcBef>
+            </a:pPr>
+            <a:r>
+              <a:rPr sz="1000" b="1">
+                <a:solidFill>
+                  <a:srgbClr val="2C6E8F"/>
+                </a:solidFill>
+                <a:latin typeface="PingFang SC"/>
+              </a:rPr>
+              <a:t>修复  </a:t>
+            </a:r>
+            <a:r>
+              <a:rPr sz="1000" b="0">
+                <a:solidFill>
+                  <a:srgbClr val="1F2933"/>
+                </a:solidFill>
+                <a:latin typeface="PingFang SC"/>
+              </a:rPr>
+              <a:t>物理核数只算一次并缓存，补丁写进启动脚本。</a:t>
+            </a:r>
+          </a:p>
+        </p:txBody>
+      </p:sp>
+      <p:sp>
+        <p:nvSpPr>
+          <p:cNvPr id="16" name="Rounded Rectangle 15"/>
+          <p:cNvSpPr/>
+          <p:nvPr/>
+        </p:nvSpPr>
+        <p:spPr>
+          <a:xfrm>
+            <a:off x="658368" y="5541264"/>
+            <a:ext cx="4251959" cy="566928"/>
+          </a:xfrm>
+          <a:prstGeom prst="roundRect">
+            <a:avLst/>
+          </a:prstGeom>
+          <a:solidFill>
+            <a:srgbClr val="FFFFFF"/>
+          </a:solidFill>
+          <a:ln>
+            <a:noFill/>
+          </a:ln>
+          <a:effectLst/>
+        </p:spPr>
+        <p:style>
+          <a:lnRef idx="1">
+            <a:schemeClr val="accent1"/>
+          </a:lnRef>
+          <a:fillRef idx="3">
+            <a:schemeClr val="accent1"/>
+          </a:fillRef>
+          <a:effectRef idx="2">
+            <a:schemeClr val="accent1"/>
+          </a:effectRef>
+          <a:fontRef idx="minor">
+            <a:schemeClr val="lt1"/>
+          </a:fontRef>
+        </p:style>
+        <p:txBody>
+          <a:bodyPr rtlCol="0" anchor="ctr"/>
+          <a:lstStyle/>
+          <a:p>
+            <a:pPr algn="ctr"/>
+          </a:p>
+        </p:txBody>
+      </p:sp>
+      <p:sp>
+        <p:nvSpPr>
+          <p:cNvPr id="17" name="TextBox 16"/>
+          <p:cNvSpPr txBox="1"/>
+          <p:nvPr/>
+        </p:nvSpPr>
+        <p:spPr>
+          <a:xfrm>
+            <a:off x="795528" y="5577840"/>
+            <a:ext cx="3977639" cy="512064"/>
+          </a:xfrm>
+          <a:prstGeom prst="rect">
+            <a:avLst/>
+          </a:prstGeom>
+          <a:noFill/>
+        </p:spPr>
+        <p:txBody>
+          <a:bodyPr wrap="square" anchor="ctr" lIns="18288" rIns="18288" tIns="18288" bIns="18288">
+            <a:spAutoFit/>
+          </a:bodyPr>
+          <a:lstStyle/>
+          <a:p>
+            <a:pPr algn="l">
+              <a:lnSpc>
+                <a:spcPct val="100000"/>
+              </a:lnSpc>
+            </a:pPr>
+            <a:r>
+              <a:rPr sz="1700" b="1">
+                <a:solidFill>
+                  <a:srgbClr val="2C6E8F"/>
+                </a:solidFill>
+                <a:latin typeface="PingFang SC"/>
+              </a:rPr>
+              <a:t>80–120 ms → 0.11–0.16 ms</a:t>
+            </a:r>
+          </a:p>
+          <a:p>
+            <a:pPr algn="l">
+              <a:lnSpc>
+                <a:spcPct val="100000"/>
+              </a:lnSpc>
+            </a:pPr>
+            <a:r>
+              <a:rPr sz="950" b="0">
+                <a:solidFill>
+                  <a:srgbClr val="6B7A8A"/>
+                </a:solidFill>
+                <a:latin typeface="PingFang SC"/>
+              </a:rPr>
+              <a:t>单次 PUT；同配置每步周期 147.4 → 111.5 s</a:t>
+            </a:r>
+          </a:p>
+        </p:txBody>
+      </p:sp>
+      <p:sp>
+        <p:nvSpPr>
+          <p:cNvPr id="18" name="Rectangle 17"/>
+          <p:cNvSpPr/>
+          <p:nvPr/>
+        </p:nvSpPr>
+        <p:spPr>
+          <a:xfrm>
+            <a:off x="5212080" y="1261872"/>
+            <a:ext cx="6519672" cy="2432304"/>
+          </a:xfrm>
+          <a:prstGeom prst="rect">
+            <a:avLst/>
+          </a:prstGeom>
+          <a:solidFill>
+            <a:srgbClr val="F4F6F8"/>
+          </a:solidFill>
+          <a:ln>
+            <a:noFill/>
+          </a:ln>
+          <a:effectLst/>
+        </p:spPr>
+        <p:style>
+          <a:lnRef idx="1">
+            <a:schemeClr val="accent1"/>
+          </a:lnRef>
+          <a:fillRef idx="3">
+            <a:schemeClr val="accent1"/>
+          </a:fillRef>
+          <a:effectRef idx="2">
+            <a:schemeClr val="accent1"/>
+          </a:effectRef>
+          <a:fontRef idx="minor">
+            <a:schemeClr val="lt1"/>
+          </a:fontRef>
+        </p:style>
+        <p:txBody>
+          <a:bodyPr rtlCol="0" anchor="ctr"/>
+          <a:lstStyle/>
+          <a:p>
+            <a:pPr algn="ctr"/>
+          </a:p>
+        </p:txBody>
+      </p:sp>
+      <p:sp>
+        <p:nvSpPr>
+          <p:cNvPr id="19" name="Rectangle 18"/>
+          <p:cNvSpPr/>
+          <p:nvPr/>
+        </p:nvSpPr>
+        <p:spPr>
+          <a:xfrm>
+            <a:off x="5212080" y="1261872"/>
+            <a:ext cx="64008" cy="2432304"/>
+          </a:xfrm>
+          <a:prstGeom prst="rect">
+            <a:avLst/>
+          </a:prstGeom>
+          <a:solidFill>
+            <a:srgbClr val="C0504D"/>
+          </a:solidFill>
+          <a:ln>
+            <a:noFill/>
+          </a:ln>
+          <a:effectLst/>
+        </p:spPr>
+        <p:style>
+          <a:lnRef idx="1">
+            <a:schemeClr val="accent1"/>
+          </a:lnRef>
+          <a:fillRef idx="3">
+            <a:schemeClr val="accent1"/>
+          </a:fillRef>
+          <a:effectRef idx="2">
+            <a:schemeClr val="accent1"/>
+          </a:effectRef>
+          <a:fontRef idx="minor">
+            <a:schemeClr val="lt1"/>
+          </a:fontRef>
+        </p:style>
+        <p:txBody>
+          <a:bodyPr rtlCol="0" anchor="ctr"/>
+          <a:lstStyle/>
+          <a:p>
+            <a:pPr algn="ctr"/>
+          </a:p>
+        </p:txBody>
+      </p:sp>
+      <p:sp>
+        <p:nvSpPr>
+          <p:cNvPr id="20" name="Rounded Rectangle 19"/>
+          <p:cNvSpPr/>
+          <p:nvPr/>
+        </p:nvSpPr>
+        <p:spPr>
+          <a:xfrm>
+            <a:off x="5413248" y="1417319"/>
+            <a:ext cx="438912" cy="237744"/>
+          </a:xfrm>
+          <a:prstGeom prst="roundRect">
+            <a:avLst/>
+          </a:prstGeom>
+          <a:solidFill>
+            <a:srgbClr val="C0504D"/>
+          </a:solidFill>
+          <a:ln>
+            <a:noFill/>
+          </a:ln>
+          <a:effectLst/>
+        </p:spPr>
+        <p:style>
+          <a:lnRef idx="1">
+            <a:schemeClr val="accent1"/>
+          </a:lnRef>
+          <a:fillRef idx="3">
+            <a:schemeClr val="accent1"/>
+          </a:fillRef>
+          <a:effectRef idx="2">
+            <a:schemeClr val="accent1"/>
+          </a:effectRef>
+          <a:fontRef idx="minor">
+            <a:schemeClr val="lt1"/>
+          </a:fontRef>
+        </p:style>
+        <p:txBody>
+          <a:bodyPr rtlCol="0" anchor="ctr" lIns="0" rIns="0" tIns="0" bIns="0"/>
+          <a:lstStyle/>
+          <a:p>
+            <a:pPr algn="ctr"/>
+            <a:r>
+              <a:rPr sz="950" b="1">
+                <a:solidFill>
+                  <a:srgbClr val="FFFFFF"/>
+                </a:solidFill>
+                <a:latin typeface="PingFang SC"/>
+              </a:rPr>
+              <a:t>并发</a:t>
+            </a:r>
+          </a:p>
+        </p:txBody>
+      </p:sp>
+      <p:sp>
+        <p:nvSpPr>
+          <p:cNvPr id="21" name="TextBox 20"/>
+          <p:cNvSpPr txBox="1"/>
+          <p:nvPr/>
+        </p:nvSpPr>
+        <p:spPr>
+          <a:xfrm>
+            <a:off x="5943600" y="1371600"/>
+            <a:ext cx="5605272" cy="329184"/>
+          </a:xfrm>
+          <a:prstGeom prst="rect">
+            <a:avLst/>
+          </a:prstGeom>
+          <a:noFill/>
+        </p:spPr>
+        <p:txBody>
+          <a:bodyPr wrap="square" anchor="t" lIns="18288" rIns="18288" tIns="18288" bIns="18288">
+            <a:spAutoFit/>
+          </a:bodyPr>
+          <a:lstStyle/>
+          <a:p>
+            <a:pPr algn="l">
+              <a:lnSpc>
+                <a:spcPct val="110000"/>
+              </a:lnSpc>
+            </a:pPr>
+            <a:r>
+              <a:rPr sz="1400" b="1">
+                <a:solidFill>
+                  <a:srgbClr val="1F2933"/>
+                </a:solidFill>
+                <a:latin typeface="PingFang SC"/>
+              </a:rPr>
+              <a:t>TQ 写 reward 的并发缺陷</a:t>
+            </a:r>
+          </a:p>
+        </p:txBody>
+      </p:sp>
+      <p:sp>
+        <p:nvSpPr>
+          <p:cNvPr id="22" name="TextBox 21"/>
+          <p:cNvSpPr txBox="1"/>
+          <p:nvPr/>
+        </p:nvSpPr>
+        <p:spPr>
+          <a:xfrm>
+            <a:off x="5413248" y="1737360"/>
+            <a:ext cx="6153912" cy="1865376"/>
+          </a:xfrm>
+          <a:prstGeom prst="rect">
+            <a:avLst/>
+          </a:prstGeom>
+          <a:noFill/>
+        </p:spPr>
+        <p:txBody>
+          <a:bodyPr wrap="square" anchor="t" lIns="18288" rIns="18288" tIns="18288" bIns="18288">
+            <a:spAutoFit/>
+          </a:bodyPr>
+          <a:lstStyle/>
+          <a:p>
+            <a:pPr algn="l">
+              <a:lnSpc>
+                <a:spcPct val="110000"/>
+              </a:lnSpc>
+            </a:pPr>
+            <a:r>
+              <a:rPr sz="1000" b="1">
+                <a:solidFill>
+                  <a:srgbClr val="1F2933"/>
+                </a:solidFill>
+                <a:latin typeface="PingFang SC"/>
+              </a:rPr>
+              <a:t>① reward 抢在最后一轮之前：</a:t>
+            </a:r>
+            <a:r>
+              <a:rPr sz="1000" b="0">
+                <a:solidFill>
+                  <a:srgbClr val="1F2933"/>
+                </a:solidFill>
+                <a:latin typeface="PingFang SC"/>
+              </a:rPr>
+              <a:t>turn 经 LiteLLM 的串行日志线程异步写入，reward 由 runner 直接写 store。高负载下组被提前判定完成，trainer 取到写了一半的行而崩溃。</a:t>
+            </a:r>
+          </a:p>
+          <a:p>
+            <a:pPr algn="l">
+              <a:lnSpc>
+                <a:spcPct val="110000"/>
+              </a:lnSpc>
+              <a:spcBef>
+                <a:spcPts val="100"/>
+              </a:spcBef>
+            </a:pPr>
+            <a:r>
+              <a:rPr sz="1000" b="1">
+                <a:solidFill>
+                  <a:srgbClr val="C0504D"/>
+                </a:solidFill>
+                <a:latin typeface="PingFang SC"/>
+              </a:rPr>
+              <a:t>→ </a:t>
+            </a:r>
+            <a:r>
+              <a:rPr sz="1000" b="0">
+                <a:solidFill>
+                  <a:srgbClr val="6B7A8A"/>
+                </a:solidFill>
+                <a:latin typeface="PingFang SC"/>
+              </a:rPr>
+              <a:t>proxy 写完这一轮才把回答还给 agent，“reward 到齐”即“每轮都已写入”；写失败时清理残留 key。</a:t>
+            </a:r>
+          </a:p>
+          <a:p>
+            <a:pPr algn="l">
+              <a:lnSpc>
+                <a:spcPct val="110000"/>
+              </a:lnSpc>
+              <a:spcBef>
+                <a:spcPts val="500"/>
+              </a:spcBef>
+            </a:pPr>
+            <a:r>
+              <a:rPr sz="1000" b="1">
+                <a:solidFill>
+                  <a:srgbClr val="1F2933"/>
+                </a:solidFill>
+                <a:latin typeface="PingFang SC"/>
+              </a:rPr>
+              <a:t>② 组完成判定的竞态：</a:t>
+            </a:r>
+            <a:r>
+              <a:rPr sz="1000" b="0">
+                <a:solidFill>
+                  <a:srgbClr val="1F2933"/>
+                </a:solidFill>
+                <a:latin typeface="PingFang SC"/>
+              </a:rPr>
+              <a:t>barrier 晚于 rollout 入队写入；同一 rollout 的多个 reward 被重复计数；正常完成与强制失败跨 await 交错。</a:t>
+            </a:r>
+          </a:p>
+          <a:p>
+            <a:pPr algn="l">
+              <a:lnSpc>
+                <a:spcPct val="110000"/>
+              </a:lnSpc>
+              <a:spcBef>
+                <a:spcPts val="100"/>
+              </a:spcBef>
+            </a:pPr>
+            <a:r>
+              <a:rPr sz="1000" b="1">
+                <a:solidFill>
+                  <a:srgbClr val="C0504D"/>
+                </a:solidFill>
+                <a:latin typeface="PingFang SC"/>
+              </a:rPr>
+              <a:t>→ </a:t>
+            </a:r>
+            <a:r>
+              <a:rPr sz="1000" b="0">
+                <a:solidFill>
+                  <a:srgbClr val="6B7A8A"/>
+                </a:solidFill>
+                <a:latin typeface="PingFang SC"/>
+              </a:rPr>
+              <a:t>barrier 先于入队写入，按 rollout_id 去重，每个组加锁。replay buffer 不再卡死。</a:t>
+            </a:r>
+          </a:p>
+          <a:p>
+            <a:pPr algn="l">
+              <a:lnSpc>
+                <a:spcPct val="110000"/>
+              </a:lnSpc>
+              <a:spcBef>
+                <a:spcPts val="500"/>
+              </a:spcBef>
+            </a:pPr>
+            <a:r>
+              <a:rPr sz="1000" b="1">
+                <a:solidFill>
+                  <a:srgbClr val="1F2933"/>
+                </a:solidFill>
+                <a:latin typeface="PingFang SC"/>
+              </a:rPr>
+              <a:t>③ 回写 reward 堵住 storage unit：</a:t>
+            </a:r>
+            <a:r>
+              <a:rPr sz="1000" b="0">
+                <a:solidFill>
+                  <a:srgbClr val="1F2933"/>
+                </a:solidFill>
+                <a:latin typeface="PingFang SC"/>
+              </a:rPr>
+              <a:t>每次回写都把 responses 整条读回来只为取长度，占每步 725 次 GET 中的 512 次。</a:t>
+            </a:r>
+          </a:p>
+          <a:p>
+            <a:pPr algn="l">
+              <a:lnSpc>
+                <a:spcPct val="110000"/>
+              </a:lnSpc>
+              <a:spcBef>
+                <a:spcPts val="100"/>
+              </a:spcBef>
+            </a:pPr>
+            <a:r>
+              <a:rPr sz="1000" b="1">
+                <a:solidFill>
+                  <a:srgbClr val="C0504D"/>
+                </a:solidFill>
+                <a:latin typeface="PingFang SC"/>
+              </a:rPr>
+              <a:t>→ </a:t>
+            </a:r>
+            <a:r>
+              <a:rPr sz="1000" b="0">
+                <a:solidFill>
+                  <a:srgbClr val="6B7A8A"/>
+                </a:solidFill>
+                <a:latin typeface="PingFang SC"/>
+              </a:rPr>
+              <a:t>改用写入时打的 response_len 标签。同配置每步周期 193.6 → 147.3 s。</a:t>
+            </a:r>
+          </a:p>
+        </p:txBody>
+      </p:sp>
+      <p:sp>
+        <p:nvSpPr>
+          <p:cNvPr id="23" name="Rectangle 22"/>
+          <p:cNvSpPr/>
+          <p:nvPr/>
+        </p:nvSpPr>
+        <p:spPr>
+          <a:xfrm>
+            <a:off x="5212080" y="3803904"/>
+            <a:ext cx="6519672" cy="2432304"/>
+          </a:xfrm>
+          <a:prstGeom prst="rect">
+            <a:avLst/>
+          </a:prstGeom>
+          <a:solidFill>
+            <a:srgbClr val="F4F6F8"/>
+          </a:solidFill>
+          <a:ln>
+            <a:noFill/>
+          </a:ln>
+          <a:effectLst/>
+        </p:spPr>
+        <p:style>
+          <a:lnRef idx="1">
+            <a:schemeClr val="accent1"/>
+          </a:lnRef>
+          <a:fillRef idx="3">
+            <a:schemeClr val="accent1"/>
+          </a:fillRef>
+          <a:effectRef idx="2">
+            <a:schemeClr val="accent1"/>
+          </a:effectRef>
+          <a:fontRef idx="minor">
+            <a:schemeClr val="lt1"/>
+          </a:fontRef>
+        </p:style>
+        <p:txBody>
+          <a:bodyPr rtlCol="0" anchor="ctr"/>
+          <a:lstStyle/>
+          <a:p>
+            <a:pPr algn="ctr"/>
+          </a:p>
+        </p:txBody>
+      </p:sp>
+      <p:sp>
+        <p:nvSpPr>
+          <p:cNvPr id="24" name="Rectangle 23"/>
+          <p:cNvSpPr/>
+          <p:nvPr/>
+        </p:nvSpPr>
+        <p:spPr>
+          <a:xfrm>
+            <a:off x="5212080" y="3803904"/>
+            <a:ext cx="64008" cy="2432304"/>
+          </a:xfrm>
+          <a:prstGeom prst="rect">
+            <a:avLst/>
+          </a:prstGeom>
+          <a:solidFill>
+            <a:srgbClr val="C0504D"/>
+          </a:solidFill>
+          <a:ln>
+            <a:noFill/>
+          </a:ln>
+          <a:effectLst/>
+        </p:spPr>
+        <p:style>
+          <a:lnRef idx="1">
+            <a:schemeClr val="accent1"/>
+          </a:lnRef>
+          <a:fillRef idx="3">
+            <a:schemeClr val="accent1"/>
+          </a:fillRef>
+          <a:effectRef idx="2">
+            <a:schemeClr val="accent1"/>
+          </a:effectRef>
+          <a:fontRef idx="minor">
+            <a:schemeClr val="lt1"/>
+          </a:fontRef>
+        </p:style>
+        <p:txBody>
+          <a:bodyPr rtlCol="0" anchor="ctr"/>
+          <a:lstStyle/>
+          <a:p>
+            <a:pPr algn="ctr"/>
+          </a:p>
+        </p:txBody>
+      </p:sp>
+      <p:sp>
+        <p:nvSpPr>
+          <p:cNvPr id="25" name="Rounded Rectangle 24"/>
+          <p:cNvSpPr/>
+          <p:nvPr/>
+        </p:nvSpPr>
+        <p:spPr>
+          <a:xfrm>
+            <a:off x="5413248" y="3959352"/>
+            <a:ext cx="438912" cy="237744"/>
+          </a:xfrm>
+          <a:prstGeom prst="roundRect">
+            <a:avLst/>
+          </a:prstGeom>
+          <a:solidFill>
+            <a:srgbClr val="C0504D"/>
+          </a:solidFill>
+          <a:ln>
+            <a:noFill/>
+          </a:ln>
+          <a:effectLst/>
+        </p:spPr>
+        <p:style>
+          <a:lnRef idx="1">
+            <a:schemeClr val="accent1"/>
+          </a:lnRef>
+          <a:fillRef idx="3">
+            <a:schemeClr val="accent1"/>
+          </a:fillRef>
+          <a:effectRef idx="2">
+            <a:schemeClr val="accent1"/>
+          </a:effectRef>
+          <a:fontRef idx="minor">
+            <a:schemeClr val="lt1"/>
+          </a:fontRef>
+        </p:style>
+        <p:txBody>
+          <a:bodyPr rtlCol="0" anchor="ctr" lIns="0" rIns="0" tIns="0" bIns="0"/>
+          <a:lstStyle/>
+          <a:p>
+            <a:pPr algn="ctr"/>
+            <a:r>
+              <a:rPr sz="950" b="1">
+                <a:solidFill>
+                  <a:srgbClr val="FFFFFF"/>
+                </a:solidFill>
+                <a:latin typeface="PingFang SC"/>
+              </a:rPr>
+              <a:t>并发</a:t>
+            </a:r>
+          </a:p>
+        </p:txBody>
+      </p:sp>
+      <p:sp>
+        <p:nvSpPr>
+          <p:cNvPr id="26" name="TextBox 25"/>
+          <p:cNvSpPr txBox="1"/>
+          <p:nvPr/>
+        </p:nvSpPr>
+        <p:spPr>
+          <a:xfrm>
+            <a:off x="5943600" y="3913632"/>
+            <a:ext cx="5605272" cy="329184"/>
+          </a:xfrm>
+          <a:prstGeom prst="rect">
+            <a:avLst/>
+          </a:prstGeom>
+          <a:noFill/>
+        </p:spPr>
+        <p:txBody>
+          <a:bodyPr wrap="square" anchor="t" lIns="18288" rIns="18288" tIns="18288" bIns="18288">
+            <a:spAutoFit/>
+          </a:bodyPr>
+          <a:lstStyle/>
+          <a:p>
+            <a:pPr algn="l">
+              <a:lnSpc>
+                <a:spcPct val="110000"/>
+              </a:lnSpc>
+            </a:pPr>
+            <a:r>
+              <a:rPr sz="1400" b="1">
+                <a:solidFill>
+                  <a:srgbClr val="1F2933"/>
+                </a:solidFill>
+                <a:latin typeface="PingFang SC"/>
+              </a:rPr>
+              <a:t>agent-lightning 与分离异步的并发缺陷（两个分离分支都已修复）</a:t>
+            </a:r>
+          </a:p>
+        </p:txBody>
+      </p:sp>
+      <p:sp>
+        <p:nvSpPr>
+          <p:cNvPr id="27" name="TextBox 26"/>
+          <p:cNvSpPr txBox="1"/>
+          <p:nvPr/>
+        </p:nvSpPr>
+        <p:spPr>
+          <a:xfrm>
+            <a:off x="5413248" y="4279392"/>
+            <a:ext cx="6153912" cy="1865376"/>
+          </a:xfrm>
+          <a:prstGeom prst="rect">
+            <a:avLst/>
+          </a:prstGeom>
+          <a:noFill/>
+        </p:spPr>
+        <p:txBody>
+          <a:bodyPr wrap="square" anchor="t" lIns="18288" rIns="18288" tIns="18288" bIns="18288">
+            <a:spAutoFit/>
+          </a:bodyPr>
+          <a:lstStyle/>
+          <a:p>
+            <a:pPr algn="l">
+              <a:lnSpc>
+                <a:spcPct val="110000"/>
+              </a:lnSpc>
+            </a:pPr>
+            <a:r>
+              <a:rPr sz="1000" b="1">
+                <a:solidFill>
+                  <a:srgbClr val="1F2933"/>
+                </a:solidFill>
+                <a:latin typeface="PingFang SC"/>
+              </a:rPr>
+              <a:t>① LLM 调用记录晚于 reward：</a:t>
+            </a:r>
+            <a:r>
+              <a:rPr sz="1000" b="0">
+                <a:solidFill>
+                  <a:srgbClr val="1F2933"/>
+                </a:solidFill>
+                <a:latin typeface="PingFang SC"/>
+              </a:rPr>
+              <a:t>无 TQ 时同样存在：span 经 LiteLLM 串行日志队列入库，rollout 一上报就算结束，高并发下最后几轮被静默丢弃。</a:t>
+            </a:r>
+          </a:p>
+          <a:p>
+            <a:pPr algn="l">
+              <a:lnSpc>
+                <a:spcPct val="110000"/>
+              </a:lnSpc>
+              <a:spcBef>
+                <a:spcPts val="100"/>
+              </a:spcBef>
+            </a:pPr>
+            <a:r>
+              <a:rPr sz="1000" b="1">
+                <a:solidFill>
+                  <a:srgbClr val="C0504D"/>
+                </a:solidFill>
+                <a:latin typeface="PingFang SC"/>
+              </a:rPr>
+              <a:t>→ </a:t>
+            </a:r>
+            <a:r>
+              <a:rPr sz="1000" b="0">
+                <a:solidFill>
+                  <a:srgbClr val="6B7A8A"/>
+                </a:solidFill>
+                <a:latin typeface="PingFang SC"/>
+              </a:rPr>
+              <a:t>每一轮写入并确认之后，才把回答还给 agent。</a:t>
+            </a:r>
+          </a:p>
+          <a:p>
+            <a:pPr algn="l">
+              <a:lnSpc>
+                <a:spcPct val="110000"/>
+              </a:lnSpc>
+              <a:spcBef>
+                <a:spcPts val="500"/>
+              </a:spcBef>
+            </a:pPr>
+            <a:r>
+              <a:rPr sz="1000" b="1">
+                <a:solidFill>
+                  <a:srgbClr val="1F2933"/>
+                </a:solidFill>
+                <a:latin typeface="PingFang SC"/>
+              </a:rPr>
+              <a:t>② LLM proxy 子进程崩溃无人察觉：</a:t>
+            </a:r>
+            <a:r>
+              <a:rPr sz="1000" b="0">
+                <a:solidFill>
+                  <a:srgbClr val="1F2933"/>
+                </a:solidFill>
+                <a:latin typeface="PingFang SC"/>
+              </a:rPr>
+              <a:t>fork 出的 proxy 继承了 trainer 的 uvloop，高负载下 SIGABRT；存活检查只看启动 / 停止调用，之后 rollout 只有 reward 没有 turn。</a:t>
+            </a:r>
+          </a:p>
+          <a:p>
+            <a:pPr algn="l">
+              <a:lnSpc>
+                <a:spcPct val="110000"/>
+              </a:lnSpc>
+              <a:spcBef>
+                <a:spcPts val="100"/>
+              </a:spcBef>
+            </a:pPr>
+            <a:r>
+              <a:rPr sz="1000" b="1">
+                <a:solidFill>
+                  <a:srgbClr val="C0504D"/>
+                </a:solidFill>
+                <a:latin typeface="PingFang SC"/>
+              </a:rPr>
+              <a:t>→ </a:t>
+            </a:r>
+            <a:r>
+              <a:rPr sz="1000" b="0">
+                <a:solidFill>
+                  <a:srgbClr val="6B7A8A"/>
+                </a:solidFill>
+                <a:latin typeface="PingFang SC"/>
+              </a:rPr>
+              <a:t>子进程改用默认事件循环；daemon 和 trainer 每步检查 proxy 存活，崩溃时报出退出码。</a:t>
+            </a:r>
+          </a:p>
+          <a:p>
+            <a:pPr algn="l">
+              <a:lnSpc>
+                <a:spcPct val="110000"/>
+              </a:lnSpc>
+              <a:spcBef>
+                <a:spcPts val="500"/>
+              </a:spcBef>
+            </a:pPr>
+            <a:r>
+              <a:rPr sz="1000" b="1">
+                <a:solidFill>
+                  <a:srgbClr val="1F2933"/>
+                </a:solidFill>
+                <a:latin typeface="PingFang SC"/>
+              </a:rPr>
+              <a:t>③ 权重同步打断生成后从未续写：</a:t>
+            </a:r>
+            <a:r>
+              <a:rPr sz="1000" b="0">
+                <a:solidFill>
+                  <a:srgbClr val="1F2933"/>
+                </a:solidFill>
+                <a:latin typeface="PingFang SC"/>
+              </a:rPr>
+              <a:t>vLLM 返回 abort，LiteLLM 改写成 stop，半截回答被当成完整回答。</a:t>
+            </a:r>
+          </a:p>
+          <a:p>
+            <a:pPr algn="l">
+              <a:lnSpc>
+                <a:spcPct val="110000"/>
+              </a:lnSpc>
+              <a:spcBef>
+                <a:spcPts val="100"/>
+              </a:spcBef>
+            </a:pPr>
+            <a:r>
+              <a:rPr sz="1000" b="1">
+                <a:solidFill>
+                  <a:srgbClr val="C0504D"/>
+                </a:solidFill>
+                <a:latin typeface="PingFang SC"/>
+              </a:rPr>
+              <a:t>→ </a:t>
+            </a:r>
+            <a:r>
+              <a:rPr sz="1000" b="0">
+                <a:solidFill>
+                  <a:srgbClr val="6B7A8A"/>
+                </a:solidFill>
+                <a:latin typeface="PingFang SC"/>
+              </a:rPr>
+              <a:t>按原始 finish_reason 判断并续写，直发 vLLM。每步 token 回到共卡的 94%–99%。</a:t>
+            </a:r>
+          </a:p>
+        </p:txBody>
+      </p:sp>
+      <p:sp>
+        <p:nvSpPr>
+          <p:cNvPr id="28" name="TextBox 27"/>
+          <p:cNvSpPr txBox="1"/>
+          <p:nvPr/>
+        </p:nvSpPr>
+        <p:spPr>
+          <a:xfrm>
+            <a:off x="457200" y="6327648"/>
+            <a:ext cx="11247120" cy="274320"/>
+          </a:xfrm>
+          <a:prstGeom prst="rect">
+            <a:avLst/>
+          </a:prstGeom>
+          <a:noFill/>
+        </p:spPr>
+        <p:txBody>
+          <a:bodyPr wrap="square" anchor="t" lIns="18288" rIns="18288" tIns="18288" bIns="18288">
+            <a:spAutoFit/>
+          </a:bodyPr>
+          <a:lstStyle/>
+          <a:p>
+            <a:pPr algn="l">
+              <a:lnSpc>
+                <a:spcPct val="110000"/>
+              </a:lnSpc>
+            </a:pPr>
+            <a:r>
+              <a:rPr sz="1000" b="0">
+                <a:solidFill>
+                  <a:srgbClr val="6B7A8A"/>
+                </a:solidFill>
+                <a:latin typeface="PingFang SC"/>
+              </a:rPr>
+              <a:t>效果数据均为 node10 实测（calc_x，Qwen3-8B，128 runner，每步 512 条 rollout）。</a:t>
+            </a:r>
+          </a:p>
+        </p:txBody>
+      </p:sp>
+    </p:spTree>
+  </p:cSld>
+  <p:clrMapOvr>
+    <a:masterClrMapping/>
+  </p:clrMapOvr>
+</p:sld>
+</file>
+
 <file path=ppt/theme/theme1.xml><?xml version="1.0" encoding="utf-8"?>
 <a:theme xmlns:a="http://schemas.openxmlformats.org/drawingml/2006/main" name="Office Theme">
   <a:themeElements>
